--- a/output_pptx/Come_Thou_Fount.pptx
+++ b/output_pptx/Come_Thou_Fount.pptx
@@ -3121,23 +3121,23 @@
         </p:nvSpPr>
         <p:spPr>
           <a:xfrm>
-            <a:off x="594360" y="1837944"/>
-            <a:ext cx="11002975" cy="685800"/>
-          </a:xfrm>
-          <a:prstGeom prst="rect">
-            <a:avLst/>
-          </a:prstGeom>
-          <a:noFill/>
-        </p:spPr>
-        <p:txBody>
-          <a:bodyPr wrap="square">
-            <a:spAutoFit/>
-          </a:bodyPr>
-          <a:lstStyle/>
-          <a:p>
-            <a:pPr algn="ctr"/>
-            <a:r>
-              <a:rPr sz="4223" b="1" i="0">
+            <a:off x="640080" y="1650492"/>
+            <a:ext cx="10911535" cy="731520"/>
+          </a:xfrm>
+          <a:prstGeom prst="rect">
+            <a:avLst/>
+          </a:prstGeom>
+          <a:noFill/>
+        </p:spPr>
+        <p:txBody>
+          <a:bodyPr wrap="square">
+            <a:spAutoFit/>
+          </a:bodyPr>
+          <a:lstStyle/>
+          <a:p>
+            <a:pPr algn="ctr"/>
+            <a:r>
+              <a:rPr sz="4600" b="1" i="0">
                 <a:solidFill>
                   <a:srgbClr val="FFFFFF"/>
                 </a:solidFill>
@@ -3156,8 +3156,8 @@
         </p:nvSpPr>
         <p:spPr>
           <a:xfrm>
-            <a:off x="594360" y="2560320"/>
-            <a:ext cx="11002975" cy="384048"/>
+            <a:off x="640080" y="2418588"/>
+            <a:ext cx="10911535" cy="365760"/>
           </a:xfrm>
           <a:prstGeom prst="rect">
             <a:avLst/>
@@ -3174,7 +3174,7 @@
             <a:r>
               <a:rPr sz="2400" b="0" i="1">
                 <a:solidFill>
-                  <a:srgbClr val="B4B4B4"/>
+                  <a:srgbClr val="AAAAAA"/>
                 </a:solidFill>
                 <a:latin typeface="Arial"/>
               </a:rPr>
@@ -3191,8 +3191,78 @@
         </p:nvSpPr>
         <p:spPr>
           <a:xfrm>
-            <a:off x="594360" y="2980944"/>
-            <a:ext cx="11002975" cy="347472"/>
+            <a:off x="640080" y="2985516"/>
+            <a:ext cx="10911535" cy="731520"/>
+          </a:xfrm>
+          <a:prstGeom prst="rect">
+            <a:avLst/>
+          </a:prstGeom>
+          <a:noFill/>
+        </p:spPr>
+        <p:txBody>
+          <a:bodyPr wrap="square">
+            <a:spAutoFit/>
+          </a:bodyPr>
+          <a:lstStyle/>
+          <a:p>
+            <a:pPr algn="ctr"/>
+            <a:r>
+              <a:rPr sz="4800" b="1" i="0">
+                <a:solidFill>
+                  <a:srgbClr val="FFFFFF"/>
+                </a:solidFill>
+                <a:latin typeface="Arial"/>
+              </a:rPr>
+              <a:t>渇ける    こころを   うるおしたまえ</a:t>
+            </a:r>
+          </a:p>
+        </p:txBody>
+      </p:sp>
+      <p:sp>
+        <p:nvSpPr>
+          <p:cNvPr id="5" name="TextBox 4"/>
+          <p:cNvSpPr txBox="1"/>
+          <p:nvPr/>
+        </p:nvSpPr>
+        <p:spPr>
+          <a:xfrm>
+            <a:off x="640080" y="3753612"/>
+            <a:ext cx="10911535" cy="365760"/>
+          </a:xfrm>
+          <a:prstGeom prst="rect">
+            <a:avLst/>
+          </a:prstGeom>
+          <a:noFill/>
+        </p:spPr>
+        <p:txBody>
+          <a:bodyPr wrap="square">
+            <a:spAutoFit/>
+          </a:bodyPr>
+          <a:lstStyle/>
+          <a:p>
+            <a:pPr algn="ctr"/>
+            <a:r>
+              <a:rPr sz="2400" b="0" i="1">
+                <a:solidFill>
+                  <a:srgbClr val="AAAAAA"/>
+                </a:solidFill>
+                <a:latin typeface="Arial"/>
+              </a:rPr>
+              <a:t>kawakeru kokoro wo  uruoshitamae</a:t>
+            </a:r>
+          </a:p>
+        </p:txBody>
+      </p:sp>
+      <p:sp>
+        <p:nvSpPr>
+          <p:cNvPr id="6" name="TextBox 5"/>
+          <p:cNvSpPr txBox="1"/>
+          <p:nvPr/>
+        </p:nvSpPr>
+        <p:spPr>
+          <a:xfrm>
+            <a:off x="640080" y="4530852"/>
+            <a:ext cx="10911535" cy="310896"/>
           </a:xfrm>
           <a:prstGeom prst="rect">
             <a:avLst/>
@@ -3209,7 +3279,7 @@
             <a:r>
               <a:rPr sz="2000" b="0" i="1">
                 <a:solidFill>
-                  <a:srgbClr val="8C8C8C"/>
+                  <a:srgbClr val="828282"/>
                 </a:solidFill>
                 <a:latin typeface="Arial"/>
               </a:rPr>
@@ -3220,84 +3290,14 @@
       </p:sp>
       <p:sp>
         <p:nvSpPr>
-          <p:cNvPr id="5" name="TextBox 4"/>
-          <p:cNvSpPr txBox="1"/>
-          <p:nvPr/>
-        </p:nvSpPr>
-        <p:spPr>
-          <a:xfrm>
-            <a:off x="594360" y="3529584"/>
-            <a:ext cx="11002975" cy="685800"/>
-          </a:xfrm>
-          <a:prstGeom prst="rect">
-            <a:avLst/>
-          </a:prstGeom>
-          <a:noFill/>
-        </p:spPr>
-        <p:txBody>
-          <a:bodyPr wrap="square">
-            <a:spAutoFit/>
-          </a:bodyPr>
-          <a:lstStyle/>
-          <a:p>
-            <a:pPr algn="ctr"/>
-            <a:r>
-              <a:rPr sz="4400" b="1" i="0">
-                <a:solidFill>
-                  <a:srgbClr val="FFFFFF"/>
-                </a:solidFill>
-                <a:latin typeface="Arial"/>
-              </a:rPr>
-              <a:t>渇ける    こころを   うるおしたまえ</a:t>
-            </a:r>
-          </a:p>
-        </p:txBody>
-      </p:sp>
-      <p:sp>
-        <p:nvSpPr>
-          <p:cNvPr id="6" name="TextBox 5"/>
-          <p:cNvSpPr txBox="1"/>
-          <p:nvPr/>
-        </p:nvSpPr>
-        <p:spPr>
-          <a:xfrm>
-            <a:off x="594360" y="4251960"/>
-            <a:ext cx="11002975" cy="384048"/>
-          </a:xfrm>
-          <a:prstGeom prst="rect">
-            <a:avLst/>
-          </a:prstGeom>
-          <a:noFill/>
-        </p:spPr>
-        <p:txBody>
-          <a:bodyPr wrap="square">
-            <a:spAutoFit/>
-          </a:bodyPr>
-          <a:lstStyle/>
-          <a:p>
-            <a:pPr algn="ctr"/>
-            <a:r>
-              <a:rPr sz="2400" b="0" i="1">
-                <a:solidFill>
-                  <a:srgbClr val="B4B4B4"/>
-                </a:solidFill>
-                <a:latin typeface="Arial"/>
-              </a:rPr>
-              <a:t>kawakeru kokoro wo  uruoshitamae</a:t>
-            </a:r>
-          </a:p>
-        </p:txBody>
-      </p:sp>
-      <p:sp>
-        <p:nvSpPr>
           <p:cNvPr id="7" name="TextBox 6"/>
           <p:cNvSpPr txBox="1"/>
           <p:nvPr/>
         </p:nvSpPr>
         <p:spPr>
           <a:xfrm>
-            <a:off x="594360" y="4672584"/>
-            <a:ext cx="11002975" cy="347472"/>
+            <a:off x="640080" y="4896612"/>
+            <a:ext cx="10911535" cy="310896"/>
           </a:xfrm>
           <a:prstGeom prst="rect">
             <a:avLst/>
@@ -3314,7 +3314,7 @@
             <a:r>
               <a:rPr sz="2000" b="0" i="1">
                 <a:solidFill>
-                  <a:srgbClr val="8C8C8C"/>
+                  <a:srgbClr val="828282"/>
                 </a:solidFill>
                 <a:latin typeface="Arial"/>
               </a:rPr>
@@ -3357,23 +3357,23 @@
         </p:nvSpPr>
         <p:spPr>
           <a:xfrm>
-            <a:off x="594360" y="2258568"/>
-            <a:ext cx="11002975" cy="685800"/>
-          </a:xfrm>
-          <a:prstGeom prst="rect">
-            <a:avLst/>
-          </a:prstGeom>
-          <a:noFill/>
-        </p:spPr>
-        <p:txBody>
-          <a:bodyPr wrap="square">
-            <a:spAutoFit/>
-          </a:bodyPr>
-          <a:lstStyle/>
-          <a:p>
-            <a:pPr algn="ctr"/>
-            <a:r>
-              <a:rPr sz="4400" b="1" i="0">
+            <a:off x="640080" y="2052828"/>
+            <a:ext cx="10911535" cy="731520"/>
+          </a:xfrm>
+          <a:prstGeom prst="rect">
+            <a:avLst/>
+          </a:prstGeom>
+          <a:noFill/>
+        </p:spPr>
+        <p:txBody>
+          <a:bodyPr wrap="square">
+            <a:spAutoFit/>
+          </a:bodyPr>
+          <a:lstStyle/>
+          <a:p>
+            <a:pPr algn="ctr"/>
+            <a:r>
+              <a:rPr sz="4800" b="1" i="0">
                 <a:solidFill>
                   <a:srgbClr val="FFFFFF"/>
                 </a:solidFill>
@@ -3392,25 +3392,60 @@
         </p:nvSpPr>
         <p:spPr>
           <a:xfrm>
-            <a:off x="594360" y="2980944"/>
-            <a:ext cx="11002975" cy="347472"/>
-          </a:xfrm>
-          <a:prstGeom prst="rect">
-            <a:avLst/>
-          </a:prstGeom>
-          <a:noFill/>
-        </p:spPr>
-        <p:txBody>
-          <a:bodyPr wrap="square">
-            <a:spAutoFit/>
-          </a:bodyPr>
-          <a:lstStyle/>
-          <a:p>
-            <a:pPr algn="ctr"/>
-            <a:r>
-              <a:rPr sz="2200" b="0" i="1">
-                <a:solidFill>
-                  <a:srgbClr val="8C8C8C"/>
+            <a:off x="640080" y="2985516"/>
+            <a:ext cx="10911535" cy="731520"/>
+          </a:xfrm>
+          <a:prstGeom prst="rect">
+            <a:avLst/>
+          </a:prstGeom>
+          <a:noFill/>
+        </p:spPr>
+        <p:txBody>
+          <a:bodyPr wrap="square">
+            <a:spAutoFit/>
+          </a:bodyPr>
+          <a:lstStyle/>
+          <a:p>
+            <a:pPr algn="ctr"/>
+            <a:r>
+              <a:rPr sz="4800" b="1" i="0">
+                <a:solidFill>
+                  <a:srgbClr val="FFFFFF"/>
+                </a:solidFill>
+                <a:latin typeface="Arial"/>
+              </a:rPr>
+              <a:t>Não conheci outra criatura</a:t>
+            </a:r>
+          </a:p>
+        </p:txBody>
+      </p:sp>
+      <p:sp>
+        <p:nvSpPr>
+          <p:cNvPr id="4" name="TextBox 3"/>
+          <p:cNvSpPr txBox="1"/>
+          <p:nvPr/>
+        </p:nvSpPr>
+        <p:spPr>
+          <a:xfrm>
+            <a:off x="640080" y="4128516"/>
+            <a:ext cx="10911535" cy="310896"/>
+          </a:xfrm>
+          <a:prstGeom prst="rect">
+            <a:avLst/>
+          </a:prstGeom>
+          <a:noFill/>
+        </p:spPr>
+        <p:txBody>
+          <a:bodyPr wrap="square">
+            <a:spAutoFit/>
+          </a:bodyPr>
+          <a:lstStyle/>
+          <a:p>
+            <a:pPr algn="ctr"/>
+            <a:r>
+              <a:rPr sz="2000" b="0" i="0">
+                <a:solidFill>
+                  <a:srgbClr val="828282"/>
                 </a:solidFill>
                 <a:latin typeface="Arial"/>
               </a:rPr>
@@ -3421,66 +3456,31 @@
       </p:sp>
       <p:sp>
         <p:nvSpPr>
-          <p:cNvPr id="4" name="TextBox 3"/>
-          <p:cNvSpPr txBox="1"/>
-          <p:nvPr/>
-        </p:nvSpPr>
-        <p:spPr>
-          <a:xfrm>
-            <a:off x="594360" y="3529584"/>
-            <a:ext cx="11002975" cy="685800"/>
-          </a:xfrm>
-          <a:prstGeom prst="rect">
-            <a:avLst/>
-          </a:prstGeom>
-          <a:noFill/>
-        </p:spPr>
-        <p:txBody>
-          <a:bodyPr wrap="square">
-            <a:spAutoFit/>
-          </a:bodyPr>
-          <a:lstStyle/>
-          <a:p>
-            <a:pPr algn="ctr"/>
-            <a:r>
-              <a:rPr sz="4400" b="1" i="0">
-                <a:solidFill>
-                  <a:srgbClr val="FFFFFF"/>
-                </a:solidFill>
-                <a:latin typeface="Arial"/>
-              </a:rPr>
-              <a:t>Não conheci outra criatura</a:t>
-            </a:r>
-          </a:p>
-        </p:txBody>
-      </p:sp>
-      <p:sp>
-        <p:nvSpPr>
           <p:cNvPr id="5" name="TextBox 4"/>
           <p:cNvSpPr txBox="1"/>
           <p:nvPr/>
         </p:nvSpPr>
         <p:spPr>
           <a:xfrm>
-            <a:off x="594360" y="4251960"/>
-            <a:ext cx="11002975" cy="347472"/>
-          </a:xfrm>
-          <a:prstGeom prst="rect">
-            <a:avLst/>
-          </a:prstGeom>
-          <a:noFill/>
-        </p:spPr>
-        <p:txBody>
-          <a:bodyPr wrap="square">
-            <a:spAutoFit/>
-          </a:bodyPr>
-          <a:lstStyle/>
-          <a:p>
-            <a:pPr algn="ctr"/>
-            <a:r>
-              <a:rPr sz="2200" b="0" i="1">
-                <a:solidFill>
-                  <a:srgbClr val="8C8C8C"/>
+            <a:off x="640080" y="4494276"/>
+            <a:ext cx="10911535" cy="310896"/>
+          </a:xfrm>
+          <a:prstGeom prst="rect">
+            <a:avLst/>
+          </a:prstGeom>
+          <a:noFill/>
+        </p:spPr>
+        <p:txBody>
+          <a:bodyPr wrap="square">
+            <a:spAutoFit/>
+          </a:bodyPr>
+          <a:lstStyle/>
+          <a:p>
+            <a:pPr algn="ctr"/>
+            <a:r>
+              <a:rPr sz="2000" b="0" i="0">
+                <a:solidFill>
+                  <a:srgbClr val="828282"/>
                 </a:solidFill>
                 <a:latin typeface="Arial"/>
               </a:rPr>
@@ -3523,23 +3523,23 @@
         </p:nvSpPr>
         <p:spPr>
           <a:xfrm>
-            <a:off x="594360" y="2258568"/>
-            <a:ext cx="11002975" cy="685800"/>
-          </a:xfrm>
-          <a:prstGeom prst="rect">
-            <a:avLst/>
-          </a:prstGeom>
-          <a:noFill/>
-        </p:spPr>
-        <p:txBody>
-          <a:bodyPr wrap="square">
-            <a:spAutoFit/>
-          </a:bodyPr>
-          <a:lstStyle/>
-          <a:p>
-            <a:pPr algn="ctr"/>
-            <a:r>
-              <a:rPr sz="4400" b="1" i="0">
+            <a:off x="640080" y="2052828"/>
+            <a:ext cx="10911535" cy="731520"/>
+          </a:xfrm>
+          <a:prstGeom prst="rect">
+            <a:avLst/>
+          </a:prstGeom>
+          <a:noFill/>
+        </p:spPr>
+        <p:txBody>
+          <a:bodyPr wrap="square">
+            <a:spAutoFit/>
+          </a:bodyPr>
+          <a:lstStyle/>
+          <a:p>
+            <a:pPr algn="ctr"/>
+            <a:r>
+              <a:rPr sz="4800" b="1" i="0">
                 <a:solidFill>
                   <a:srgbClr val="FFFFFF"/>
                 </a:solidFill>
@@ -3558,99 +3558,29 @@
         </p:nvSpPr>
         <p:spPr>
           <a:xfrm>
-            <a:off x="594360" y="2980944"/>
-            <a:ext cx="11002975" cy="347472"/>
-          </a:xfrm>
-          <a:prstGeom prst="rect">
-            <a:avLst/>
-          </a:prstGeom>
-          <a:noFill/>
-        </p:spPr>
-        <p:txBody>
-          <a:bodyPr wrap="square">
-            <a:spAutoFit/>
-          </a:bodyPr>
-          <a:lstStyle/>
-          <a:p>
-            <a:pPr algn="ctr"/>
-            <a:r>
-              <a:rPr sz="2200" b="0" i="1">
-                <a:solidFill>
-                  <a:srgbClr val="8C8C8C"/>
-                </a:solidFill>
-                <a:latin typeface="Arial"/>
-              </a:rPr>
-              <a:t/>
-            </a:r>
-          </a:p>
-        </p:txBody>
-      </p:sp>
-      <p:sp>
-        <p:nvSpPr>
-          <p:cNvPr id="4" name="TextBox 3"/>
-          <p:cNvSpPr txBox="1"/>
-          <p:nvPr/>
-        </p:nvSpPr>
-        <p:spPr>
-          <a:xfrm>
-            <a:off x="594360" y="3529584"/>
-            <a:ext cx="11002975" cy="685800"/>
-          </a:xfrm>
-          <a:prstGeom prst="rect">
-            <a:avLst/>
-          </a:prstGeom>
-          <a:noFill/>
-        </p:spPr>
-        <p:txBody>
-          <a:bodyPr wrap="square">
-            <a:spAutoFit/>
-          </a:bodyPr>
-          <a:lstStyle/>
-          <a:p>
-            <a:pPr algn="ctr"/>
-            <a:r>
-              <a:rPr sz="4400" b="1" i="0">
+            <a:off x="640080" y="2985516"/>
+            <a:ext cx="10911535" cy="731520"/>
+          </a:xfrm>
+          <a:prstGeom prst="rect">
+            <a:avLst/>
+          </a:prstGeom>
+          <a:noFill/>
+        </p:spPr>
+        <p:txBody>
+          <a:bodyPr wrap="square">
+            <a:spAutoFit/>
+          </a:bodyPr>
+          <a:lstStyle/>
+          <a:p>
+            <a:pPr algn="ctr"/>
+            <a:r>
+              <a:rPr sz="4800" b="1" i="0">
                 <a:solidFill>
                   <a:srgbClr val="FFFFFF"/>
                 </a:solidFill>
                 <a:latin typeface="Arial"/>
               </a:rPr>
               <a:t>Senhor, eu sinto isso</a:t>
-            </a:r>
-          </a:p>
-        </p:txBody>
-      </p:sp>
-      <p:sp>
-        <p:nvSpPr>
-          <p:cNvPr id="5" name="TextBox 4"/>
-          <p:cNvSpPr txBox="1"/>
-          <p:nvPr/>
-        </p:nvSpPr>
-        <p:spPr>
-          <a:xfrm>
-            <a:off x="594360" y="4251960"/>
-            <a:ext cx="11002975" cy="347472"/>
-          </a:xfrm>
-          <a:prstGeom prst="rect">
-            <a:avLst/>
-          </a:prstGeom>
-          <a:noFill/>
-        </p:spPr>
-        <p:txBody>
-          <a:bodyPr wrap="square">
-            <a:spAutoFit/>
-          </a:bodyPr>
-          <a:lstStyle/>
-          <a:p>
-            <a:pPr algn="ctr"/>
-            <a:r>
-              <a:rPr sz="2200" b="0" i="1">
-                <a:solidFill>
-                  <a:srgbClr val="8C8C8C"/>
-                </a:solidFill>
-                <a:latin typeface="Arial"/>
-              </a:rPr>
-              <a:t/>
             </a:r>
           </a:p>
         </p:txBody>
@@ -3689,23 +3619,23 @@
         </p:nvSpPr>
         <p:spPr>
           <a:xfrm>
-            <a:off x="594360" y="2258568"/>
-            <a:ext cx="11002975" cy="685800"/>
-          </a:xfrm>
-          <a:prstGeom prst="rect">
-            <a:avLst/>
-          </a:prstGeom>
-          <a:noFill/>
-        </p:spPr>
-        <p:txBody>
-          <a:bodyPr wrap="square">
-            <a:spAutoFit/>
-          </a:bodyPr>
-          <a:lstStyle/>
-          <a:p>
-            <a:pPr algn="ctr"/>
-            <a:r>
-              <a:rPr sz="4400" b="1" i="0">
+            <a:off x="640080" y="2052828"/>
+            <a:ext cx="10911535" cy="731520"/>
+          </a:xfrm>
+          <a:prstGeom prst="rect">
+            <a:avLst/>
+          </a:prstGeom>
+          <a:noFill/>
+        </p:spPr>
+        <p:txBody>
+          <a:bodyPr wrap="square">
+            <a:spAutoFit/>
+          </a:bodyPr>
+          <a:lstStyle/>
+          <a:p>
+            <a:pPr algn="ctr"/>
+            <a:r>
+              <a:rPr sz="4800" b="1" i="0">
                 <a:solidFill>
                   <a:srgbClr val="FFFFFF"/>
                 </a:solidFill>
@@ -3724,99 +3654,29 @@
         </p:nvSpPr>
         <p:spPr>
           <a:xfrm>
-            <a:off x="594360" y="2980944"/>
-            <a:ext cx="11002975" cy="347472"/>
-          </a:xfrm>
-          <a:prstGeom prst="rect">
-            <a:avLst/>
-          </a:prstGeom>
-          <a:noFill/>
-        </p:spPr>
-        <p:txBody>
-          <a:bodyPr wrap="square">
-            <a:spAutoFit/>
-          </a:bodyPr>
-          <a:lstStyle/>
-          <a:p>
-            <a:pPr algn="ctr"/>
-            <a:r>
-              <a:rPr sz="2200" b="0" i="1">
-                <a:solidFill>
-                  <a:srgbClr val="8C8C8C"/>
-                </a:solidFill>
-                <a:latin typeface="Arial"/>
-              </a:rPr>
-              <a:t/>
-            </a:r>
-          </a:p>
-        </p:txBody>
-      </p:sp>
-      <p:sp>
-        <p:nvSpPr>
-          <p:cNvPr id="4" name="TextBox 3"/>
-          <p:cNvSpPr txBox="1"/>
-          <p:nvPr/>
-        </p:nvSpPr>
-        <p:spPr>
-          <a:xfrm>
-            <a:off x="594360" y="3529584"/>
-            <a:ext cx="11002975" cy="685800"/>
-          </a:xfrm>
-          <a:prstGeom prst="rect">
-            <a:avLst/>
-          </a:prstGeom>
-          <a:noFill/>
-        </p:spPr>
-        <p:txBody>
-          <a:bodyPr wrap="square">
-            <a:spAutoFit/>
-          </a:bodyPr>
-          <a:lstStyle/>
-          <a:p>
-            <a:pPr algn="ctr"/>
-            <a:r>
-              <a:rPr sz="4400" b="1" i="0">
+            <a:off x="640080" y="2985516"/>
+            <a:ext cx="10911535" cy="731520"/>
+          </a:xfrm>
+          <a:prstGeom prst="rect">
+            <a:avLst/>
+          </a:prstGeom>
+          <a:noFill/>
+        </p:spPr>
+        <p:txBody>
+          <a:bodyPr wrap="square">
+            <a:spAutoFit/>
+          </a:bodyPr>
+          <a:lstStyle/>
+          <a:p>
+            <a:pPr algn="ctr"/>
+            <a:r>
+              <a:rPr sz="4800" b="1" i="0">
                 <a:solidFill>
                   <a:srgbClr val="FFFFFF"/>
                 </a:solidFill>
                 <a:latin typeface="Arial"/>
               </a:rPr>
               <a:t>O Deus que amo</a:t>
-            </a:r>
-          </a:p>
-        </p:txBody>
-      </p:sp>
-      <p:sp>
-        <p:nvSpPr>
-          <p:cNvPr id="5" name="TextBox 4"/>
-          <p:cNvSpPr txBox="1"/>
-          <p:nvPr/>
-        </p:nvSpPr>
-        <p:spPr>
-          <a:xfrm>
-            <a:off x="594360" y="4251960"/>
-            <a:ext cx="11002975" cy="347472"/>
-          </a:xfrm>
-          <a:prstGeom prst="rect">
-            <a:avLst/>
-          </a:prstGeom>
-          <a:noFill/>
-        </p:spPr>
-        <p:txBody>
-          <a:bodyPr wrap="square">
-            <a:spAutoFit/>
-          </a:bodyPr>
-          <a:lstStyle/>
-          <a:p>
-            <a:pPr algn="ctr"/>
-            <a:r>
-              <a:rPr sz="2200" b="0" i="1">
-                <a:solidFill>
-                  <a:srgbClr val="8C8C8C"/>
-                </a:solidFill>
-                <a:latin typeface="Arial"/>
-              </a:rPr>
-              <a:t/>
             </a:r>
           </a:p>
         </p:txBody>
@@ -3855,23 +3715,23 @@
         </p:nvSpPr>
         <p:spPr>
           <a:xfrm>
-            <a:off x="594360" y="1837944"/>
-            <a:ext cx="11002975" cy="685800"/>
-          </a:xfrm>
-          <a:prstGeom prst="rect">
-            <a:avLst/>
-          </a:prstGeom>
-          <a:noFill/>
-        </p:spPr>
-        <p:txBody>
-          <a:bodyPr wrap="square">
-            <a:spAutoFit/>
-          </a:bodyPr>
-          <a:lstStyle/>
-          <a:p>
-            <a:pPr algn="ctr"/>
-            <a:r>
-              <a:rPr sz="4400" b="1" i="0">
+            <a:off x="640080" y="1650492"/>
+            <a:ext cx="10911535" cy="731520"/>
+          </a:xfrm>
+          <a:prstGeom prst="rect">
+            <a:avLst/>
+          </a:prstGeom>
+          <a:noFill/>
+        </p:spPr>
+        <p:txBody>
+          <a:bodyPr wrap="square">
+            <a:spAutoFit/>
+          </a:bodyPr>
+          <a:lstStyle/>
+          <a:p>
+            <a:pPr algn="ctr"/>
+            <a:r>
+              <a:rPr sz="4800" b="1" i="0">
                 <a:solidFill>
                   <a:srgbClr val="FFFFFF"/>
                 </a:solidFill>
@@ -3890,8 +3750,8 @@
         </p:nvSpPr>
         <p:spPr>
           <a:xfrm>
-            <a:off x="594360" y="2560320"/>
-            <a:ext cx="11002975" cy="384048"/>
+            <a:off x="640080" y="2418588"/>
+            <a:ext cx="10911535" cy="365760"/>
           </a:xfrm>
           <a:prstGeom prst="rect">
             <a:avLst/>
@@ -3908,7 +3768,7 @@
             <a:r>
               <a:rPr sz="2400" b="0" i="1">
                 <a:solidFill>
-                  <a:srgbClr val="B4B4B4"/>
+                  <a:srgbClr val="AAAAAA"/>
                 </a:solidFill>
                 <a:latin typeface="Arial"/>
               </a:rPr>
@@ -3925,8 +3785,78 @@
         </p:nvSpPr>
         <p:spPr>
           <a:xfrm>
-            <a:off x="594360" y="2980944"/>
-            <a:ext cx="11002975" cy="347472"/>
+            <a:off x="640080" y="2985516"/>
+            <a:ext cx="10911535" cy="731520"/>
+          </a:xfrm>
+          <a:prstGeom prst="rect">
+            <a:avLst/>
+          </a:prstGeom>
+          <a:noFill/>
+        </p:spPr>
+        <p:txBody>
+          <a:bodyPr wrap="square">
+            <a:spAutoFit/>
+          </a:bodyPr>
+          <a:lstStyle/>
+          <a:p>
+            <a:pPr algn="ctr"/>
+            <a:r>
+              <a:rPr sz="4800" b="1" i="0">
+                <a:solidFill>
+                  <a:srgbClr val="FFFFFF"/>
+                </a:solidFill>
+                <a:latin typeface="Arial"/>
+              </a:rPr>
+              <a:t>結びつ      けたもう 揺らぐこ  ころを</a:t>
+            </a:r>
+          </a:p>
+        </p:txBody>
+      </p:sp>
+      <p:sp>
+        <p:nvSpPr>
+          <p:cNvPr id="5" name="TextBox 4"/>
+          <p:cNvSpPr txBox="1"/>
+          <p:nvPr/>
+        </p:nvSpPr>
+        <p:spPr>
+          <a:xfrm>
+            <a:off x="640080" y="3753612"/>
+            <a:ext cx="10911535" cy="365760"/>
+          </a:xfrm>
+          <a:prstGeom prst="rect">
+            <a:avLst/>
+          </a:prstGeom>
+          <a:noFill/>
+        </p:spPr>
+        <p:txBody>
+          <a:bodyPr wrap="square">
+            <a:spAutoFit/>
+          </a:bodyPr>
+          <a:lstStyle/>
+          <a:p>
+            <a:pPr algn="ctr"/>
+            <a:r>
+              <a:rPr sz="2400" b="0" i="1">
+                <a:solidFill>
+                  <a:srgbClr val="AAAAAA"/>
+                </a:solidFill>
+                <a:latin typeface="Arial"/>
+              </a:rPr>
+              <a:t>Musubitsu ketamou yuraguko koro wo</a:t>
+            </a:r>
+          </a:p>
+        </p:txBody>
+      </p:sp>
+      <p:sp>
+        <p:nvSpPr>
+          <p:cNvPr id="6" name="TextBox 5"/>
+          <p:cNvSpPr txBox="1"/>
+          <p:nvPr/>
+        </p:nvSpPr>
+        <p:spPr>
+          <a:xfrm>
+            <a:off x="640080" y="4530852"/>
+            <a:ext cx="10911535" cy="310896"/>
           </a:xfrm>
           <a:prstGeom prst="rect">
             <a:avLst/>
@@ -3943,7 +3873,7 @@
             <a:r>
               <a:rPr sz="2000" b="0" i="1">
                 <a:solidFill>
-                  <a:srgbClr val="8C8C8C"/>
+                  <a:srgbClr val="828282"/>
                 </a:solidFill>
                 <a:latin typeface="Arial"/>
               </a:rPr>
@@ -3954,84 +3884,14 @@
       </p:sp>
       <p:sp>
         <p:nvSpPr>
-          <p:cNvPr id="5" name="TextBox 4"/>
-          <p:cNvSpPr txBox="1"/>
-          <p:nvPr/>
-        </p:nvSpPr>
-        <p:spPr>
-          <a:xfrm>
-            <a:off x="594360" y="3529584"/>
-            <a:ext cx="11002975" cy="685800"/>
-          </a:xfrm>
-          <a:prstGeom prst="rect">
-            <a:avLst/>
-          </a:prstGeom>
-          <a:noFill/>
-        </p:spPr>
-        <p:txBody>
-          <a:bodyPr wrap="square">
-            <a:spAutoFit/>
-          </a:bodyPr>
-          <a:lstStyle/>
-          <a:p>
-            <a:pPr algn="ctr"/>
-            <a:r>
-              <a:rPr sz="4400" b="1" i="0">
-                <a:solidFill>
-                  <a:srgbClr val="FFFFFF"/>
-                </a:solidFill>
-                <a:latin typeface="Arial"/>
-              </a:rPr>
-              <a:t>結びつ      けたもう 揺らぐこ  ころを</a:t>
-            </a:r>
-          </a:p>
-        </p:txBody>
-      </p:sp>
-      <p:sp>
-        <p:nvSpPr>
-          <p:cNvPr id="6" name="TextBox 5"/>
-          <p:cNvSpPr txBox="1"/>
-          <p:nvPr/>
-        </p:nvSpPr>
-        <p:spPr>
-          <a:xfrm>
-            <a:off x="594360" y="4251960"/>
-            <a:ext cx="11002975" cy="384048"/>
-          </a:xfrm>
-          <a:prstGeom prst="rect">
-            <a:avLst/>
-          </a:prstGeom>
-          <a:noFill/>
-        </p:spPr>
-        <p:txBody>
-          <a:bodyPr wrap="square">
-            <a:spAutoFit/>
-          </a:bodyPr>
-          <a:lstStyle/>
-          <a:p>
-            <a:pPr algn="ctr"/>
-            <a:r>
-              <a:rPr sz="2400" b="0" i="1">
-                <a:solidFill>
-                  <a:srgbClr val="B4B4B4"/>
-                </a:solidFill>
-                <a:latin typeface="Arial"/>
-              </a:rPr>
-              <a:t>Musubitsu ketamou yuraguko koro wo</a:t>
-            </a:r>
-          </a:p>
-        </p:txBody>
-      </p:sp>
-      <p:sp>
-        <p:nvSpPr>
           <p:cNvPr id="7" name="TextBox 6"/>
           <p:cNvSpPr txBox="1"/>
           <p:nvPr/>
         </p:nvSpPr>
         <p:spPr>
           <a:xfrm>
-            <a:off x="594360" y="4672584"/>
-            <a:ext cx="11002975" cy="347472"/>
+            <a:off x="640080" y="4896612"/>
+            <a:ext cx="10911535" cy="310896"/>
           </a:xfrm>
           <a:prstGeom prst="rect">
             <a:avLst/>
@@ -4048,7 +3908,7 @@
             <a:r>
               <a:rPr sz="2000" b="0" i="1">
                 <a:solidFill>
-                  <a:srgbClr val="8C8C8C"/>
+                  <a:srgbClr val="828282"/>
                 </a:solidFill>
                 <a:latin typeface="Arial"/>
               </a:rPr>
@@ -4091,23 +3951,23 @@
         </p:nvSpPr>
         <p:spPr>
           <a:xfrm>
-            <a:off x="594360" y="1837944"/>
-            <a:ext cx="11002975" cy="685800"/>
-          </a:xfrm>
-          <a:prstGeom prst="rect">
-            <a:avLst/>
-          </a:prstGeom>
-          <a:noFill/>
-        </p:spPr>
-        <p:txBody>
-          <a:bodyPr wrap="square">
-            <a:spAutoFit/>
-          </a:bodyPr>
-          <a:lstStyle/>
-          <a:p>
-            <a:pPr algn="ctr"/>
-            <a:r>
-              <a:rPr sz="4400" b="1" i="0">
+            <a:off x="640080" y="1650492"/>
+            <a:ext cx="10911535" cy="731520"/>
+          </a:xfrm>
+          <a:prstGeom prst="rect">
+            <a:avLst/>
+          </a:prstGeom>
+          <a:noFill/>
+        </p:spPr>
+        <p:txBody>
+          <a:bodyPr wrap="square">
+            <a:spAutoFit/>
+          </a:bodyPr>
+          <a:lstStyle/>
+          <a:p>
+            <a:pPr algn="ctr"/>
+            <a:r>
+              <a:rPr sz="4800" b="1" i="0">
                 <a:solidFill>
                   <a:srgbClr val="FFFFFF"/>
                 </a:solidFill>
@@ -4126,8 +3986,8 @@
         </p:nvSpPr>
         <p:spPr>
           <a:xfrm>
-            <a:off x="594360" y="2560320"/>
-            <a:ext cx="11002975" cy="384048"/>
+            <a:off x="640080" y="2418588"/>
+            <a:ext cx="10911535" cy="365760"/>
           </a:xfrm>
           <a:prstGeom prst="rect">
             <a:avLst/>
@@ -4144,7 +4004,7 @@
             <a:r>
               <a:rPr sz="2400" b="0" i="1">
                 <a:solidFill>
-                  <a:srgbClr val="B4B4B4"/>
+                  <a:srgbClr val="AAAAAA"/>
                 </a:solidFill>
                 <a:latin typeface="Arial"/>
               </a:rPr>
@@ -4161,8 +4021,78 @@
         </p:nvSpPr>
         <p:spPr>
           <a:xfrm>
-            <a:off x="594360" y="2980944"/>
-            <a:ext cx="11002975" cy="347472"/>
+            <a:off x="640080" y="2985516"/>
+            <a:ext cx="10911535" cy="731520"/>
+          </a:xfrm>
+          <a:prstGeom prst="rect">
+            <a:avLst/>
+          </a:prstGeom>
+          <a:noFill/>
+        </p:spPr>
+        <p:txBody>
+          <a:bodyPr wrap="square">
+            <a:spAutoFit/>
+          </a:bodyPr>
+          <a:lstStyle/>
+          <a:p>
+            <a:pPr algn="ctr"/>
+            <a:r>
+              <a:rPr sz="4800" b="1" i="0">
+                <a:solidFill>
+                  <a:srgbClr val="FFFFFF"/>
+                </a:solidFill>
+                <a:latin typeface="Arial"/>
+              </a:rPr>
+              <a:t>あめなる御くにに みちびきたまえ</a:t>
+            </a:r>
+          </a:p>
+        </p:txBody>
+      </p:sp>
+      <p:sp>
+        <p:nvSpPr>
+          <p:cNvPr id="5" name="TextBox 4"/>
+          <p:cNvSpPr txBox="1"/>
+          <p:nvPr/>
+        </p:nvSpPr>
+        <p:spPr>
+          <a:xfrm>
+            <a:off x="640080" y="3753612"/>
+            <a:ext cx="10911535" cy="365760"/>
+          </a:xfrm>
+          <a:prstGeom prst="rect">
+            <a:avLst/>
+          </a:prstGeom>
+          <a:noFill/>
+        </p:spPr>
+        <p:txBody>
+          <a:bodyPr wrap="square">
+            <a:spAutoFit/>
+          </a:bodyPr>
+          <a:lstStyle/>
+          <a:p>
+            <a:pPr algn="ctr"/>
+            <a:r>
+              <a:rPr sz="2400" b="0" i="1">
+                <a:solidFill>
+                  <a:srgbClr val="AAAAAA"/>
+                </a:solidFill>
+                <a:latin typeface="Arial"/>
+              </a:rPr>
+              <a:t>amenaru mikuni ni michibiki tamae</a:t>
+            </a:r>
+          </a:p>
+        </p:txBody>
+      </p:sp>
+      <p:sp>
+        <p:nvSpPr>
+          <p:cNvPr id="6" name="TextBox 5"/>
+          <p:cNvSpPr txBox="1"/>
+          <p:nvPr/>
+        </p:nvSpPr>
+        <p:spPr>
+          <a:xfrm>
+            <a:off x="640080" y="4530852"/>
+            <a:ext cx="10911535" cy="310896"/>
           </a:xfrm>
           <a:prstGeom prst="rect">
             <a:avLst/>
@@ -4179,7 +4109,7 @@
             <a:r>
               <a:rPr sz="2000" b="0" i="1">
                 <a:solidFill>
-                  <a:srgbClr val="8C8C8C"/>
+                  <a:srgbClr val="828282"/>
                 </a:solidFill>
                 <a:latin typeface="Arial"/>
               </a:rPr>
@@ -4190,84 +4120,14 @@
       </p:sp>
       <p:sp>
         <p:nvSpPr>
-          <p:cNvPr id="5" name="TextBox 4"/>
-          <p:cNvSpPr txBox="1"/>
-          <p:nvPr/>
-        </p:nvSpPr>
-        <p:spPr>
-          <a:xfrm>
-            <a:off x="594360" y="3529584"/>
-            <a:ext cx="11002975" cy="685800"/>
-          </a:xfrm>
-          <a:prstGeom prst="rect">
-            <a:avLst/>
-          </a:prstGeom>
-          <a:noFill/>
-        </p:spPr>
-        <p:txBody>
-          <a:bodyPr wrap="square">
-            <a:spAutoFit/>
-          </a:bodyPr>
-          <a:lstStyle/>
-          <a:p>
-            <a:pPr algn="ctr"/>
-            <a:r>
-              <a:rPr sz="4400" b="1" i="0">
-                <a:solidFill>
-                  <a:srgbClr val="FFFFFF"/>
-                </a:solidFill>
-                <a:latin typeface="Arial"/>
-              </a:rPr>
-              <a:t>あめなる御くにに みちびきたまえ</a:t>
-            </a:r>
-          </a:p>
-        </p:txBody>
-      </p:sp>
-      <p:sp>
-        <p:nvSpPr>
-          <p:cNvPr id="6" name="TextBox 5"/>
-          <p:cNvSpPr txBox="1"/>
-          <p:nvPr/>
-        </p:nvSpPr>
-        <p:spPr>
-          <a:xfrm>
-            <a:off x="594360" y="4251960"/>
-            <a:ext cx="11002975" cy="384048"/>
-          </a:xfrm>
-          <a:prstGeom prst="rect">
-            <a:avLst/>
-          </a:prstGeom>
-          <a:noFill/>
-        </p:spPr>
-        <p:txBody>
-          <a:bodyPr wrap="square">
-            <a:spAutoFit/>
-          </a:bodyPr>
-          <a:lstStyle/>
-          <a:p>
-            <a:pPr algn="ctr"/>
-            <a:r>
-              <a:rPr sz="2400" b="0" i="1">
-                <a:solidFill>
-                  <a:srgbClr val="B4B4B4"/>
-                </a:solidFill>
-                <a:latin typeface="Arial"/>
-              </a:rPr>
-              <a:t>amenaru mikuni ni michibiki tamae</a:t>
-            </a:r>
-          </a:p>
-        </p:txBody>
-      </p:sp>
-      <p:sp>
-        <p:nvSpPr>
           <p:cNvPr id="7" name="TextBox 6"/>
           <p:cNvSpPr txBox="1"/>
           <p:nvPr/>
         </p:nvSpPr>
         <p:spPr>
           <a:xfrm>
-            <a:off x="594360" y="4672584"/>
-            <a:ext cx="11002975" cy="347472"/>
+            <a:off x="640080" y="4896612"/>
+            <a:ext cx="10911535" cy="310896"/>
           </a:xfrm>
           <a:prstGeom prst="rect">
             <a:avLst/>
@@ -4284,7 +4144,7 @@
             <a:r>
               <a:rPr sz="2000" b="0" i="1">
                 <a:solidFill>
-                  <a:srgbClr val="8C8C8C"/>
+                  <a:srgbClr val="828282"/>
                 </a:solidFill>
                 <a:latin typeface="Arial"/>
               </a:rPr>
@@ -4327,23 +4187,23 @@
         </p:nvSpPr>
         <p:spPr>
           <a:xfrm>
-            <a:off x="594360" y="2258568"/>
-            <a:ext cx="11002975" cy="685800"/>
-          </a:xfrm>
-          <a:prstGeom prst="rect">
-            <a:avLst/>
-          </a:prstGeom>
-          <a:noFill/>
-        </p:spPr>
-        <p:txBody>
-          <a:bodyPr wrap="square">
-            <a:spAutoFit/>
-          </a:bodyPr>
-          <a:lstStyle/>
-          <a:p>
-            <a:pPr algn="ctr"/>
-            <a:r>
-              <a:rPr sz="4400" b="1" i="0">
+            <a:off x="640080" y="2052828"/>
+            <a:ext cx="10911535" cy="731520"/>
+          </a:xfrm>
+          <a:prstGeom prst="rect">
+            <a:avLst/>
+          </a:prstGeom>
+          <a:noFill/>
+        </p:spPr>
+        <p:txBody>
+          <a:bodyPr wrap="square">
+            <a:spAutoFit/>
+          </a:bodyPr>
+          <a:lstStyle/>
+          <a:p>
+            <a:pPr algn="ctr"/>
+            <a:r>
+              <a:rPr sz="4800" b="1" i="0">
                 <a:solidFill>
                   <a:srgbClr val="FFFFFF"/>
                 </a:solidFill>
@@ -4362,25 +4222,60 @@
         </p:nvSpPr>
         <p:spPr>
           <a:xfrm>
-            <a:off x="594360" y="2980944"/>
-            <a:ext cx="11002975" cy="347472"/>
-          </a:xfrm>
-          <a:prstGeom prst="rect">
-            <a:avLst/>
-          </a:prstGeom>
-          <a:noFill/>
-        </p:spPr>
-        <p:txBody>
-          <a:bodyPr wrap="square">
-            <a:spAutoFit/>
-          </a:bodyPr>
-          <a:lstStyle/>
-          <a:p>
-            <a:pPr algn="ctr"/>
-            <a:r>
-              <a:rPr sz="2200" b="0" i="1">
-                <a:solidFill>
-                  <a:srgbClr val="8C8C8C"/>
+            <a:off x="640080" y="2985516"/>
+            <a:ext cx="10911535" cy="731520"/>
+          </a:xfrm>
+          <a:prstGeom prst="rect">
+            <a:avLst/>
+          </a:prstGeom>
+          <a:noFill/>
+        </p:spPr>
+        <p:txBody>
+          <a:bodyPr wrap="square">
+            <a:spAutoFit/>
+          </a:bodyPr>
+          <a:lstStyle/>
+          <a:p>
+            <a:pPr algn="ctr"/>
+            <a:r>
+              <a:rPr sz="4500" b="1" i="0">
+                <a:solidFill>
+                  <a:srgbClr val="FFFFFF"/>
+                </a:solidFill>
+                <a:latin typeface="Arial"/>
+              </a:rPr>
+              <a:t>Para que nunca mais me parta de Ti</a:t>
+            </a:r>
+          </a:p>
+        </p:txBody>
+      </p:sp>
+      <p:sp>
+        <p:nvSpPr>
+          <p:cNvPr id="4" name="TextBox 3"/>
+          <p:cNvSpPr txBox="1"/>
+          <p:nvPr/>
+        </p:nvSpPr>
+        <p:spPr>
+          <a:xfrm>
+            <a:off x="640080" y="4128516"/>
+            <a:ext cx="10911535" cy="310896"/>
+          </a:xfrm>
+          <a:prstGeom prst="rect">
+            <a:avLst/>
+          </a:prstGeom>
+          <a:noFill/>
+        </p:spPr>
+        <p:txBody>
+          <a:bodyPr wrap="square">
+            <a:spAutoFit/>
+          </a:bodyPr>
+          <a:lstStyle/>
+          <a:p>
+            <a:pPr algn="ctr"/>
+            <a:r>
+              <a:rPr sz="2000" b="0" i="0">
+                <a:solidFill>
+                  <a:srgbClr val="828282"/>
                 </a:solidFill>
                 <a:latin typeface="Arial"/>
               </a:rPr>
@@ -4391,66 +4286,31 @@
       </p:sp>
       <p:sp>
         <p:nvSpPr>
-          <p:cNvPr id="4" name="TextBox 3"/>
-          <p:cNvSpPr txBox="1"/>
-          <p:nvPr/>
-        </p:nvSpPr>
-        <p:spPr>
-          <a:xfrm>
-            <a:off x="594360" y="3529584"/>
-            <a:ext cx="11002975" cy="685800"/>
-          </a:xfrm>
-          <a:prstGeom prst="rect">
-            <a:avLst/>
-          </a:prstGeom>
-          <a:noFill/>
-        </p:spPr>
-        <p:txBody>
-          <a:bodyPr wrap="square">
-            <a:spAutoFit/>
-          </a:bodyPr>
-          <a:lstStyle/>
-          <a:p>
-            <a:pPr algn="ctr"/>
-            <a:r>
-              <a:rPr sz="4141" b="1" i="0">
-                <a:solidFill>
-                  <a:srgbClr val="FFFFFF"/>
-                </a:solidFill>
-                <a:latin typeface="Arial"/>
-              </a:rPr>
-              <a:t>Para que nunca mais me parta de Ti</a:t>
-            </a:r>
-          </a:p>
-        </p:txBody>
-      </p:sp>
-      <p:sp>
-        <p:nvSpPr>
           <p:cNvPr id="5" name="TextBox 4"/>
           <p:cNvSpPr txBox="1"/>
           <p:nvPr/>
         </p:nvSpPr>
         <p:spPr>
           <a:xfrm>
-            <a:off x="594360" y="4251960"/>
-            <a:ext cx="11002975" cy="347472"/>
-          </a:xfrm>
-          <a:prstGeom prst="rect">
-            <a:avLst/>
-          </a:prstGeom>
-          <a:noFill/>
-        </p:spPr>
-        <p:txBody>
-          <a:bodyPr wrap="square">
-            <a:spAutoFit/>
-          </a:bodyPr>
-          <a:lstStyle/>
-          <a:p>
-            <a:pPr algn="ctr"/>
-            <a:r>
-              <a:rPr sz="2200" b="0" i="1">
-                <a:solidFill>
-                  <a:srgbClr val="8C8C8C"/>
+            <a:off x="640080" y="4494276"/>
+            <a:ext cx="10911535" cy="310896"/>
+          </a:xfrm>
+          <a:prstGeom prst="rect">
+            <a:avLst/>
+          </a:prstGeom>
+          <a:noFill/>
+        </p:spPr>
+        <p:txBody>
+          <a:bodyPr wrap="square">
+            <a:spAutoFit/>
+          </a:bodyPr>
+          <a:lstStyle/>
+          <a:p>
+            <a:pPr algn="ctr"/>
+            <a:r>
+              <a:rPr sz="2000" b="0" i="0">
+                <a:solidFill>
+                  <a:srgbClr val="828282"/>
                 </a:solidFill>
                 <a:latin typeface="Arial"/>
               </a:rPr>
@@ -4493,23 +4353,23 @@
         </p:nvSpPr>
         <p:spPr>
           <a:xfrm>
-            <a:off x="594360" y="2258568"/>
-            <a:ext cx="11002975" cy="685800"/>
-          </a:xfrm>
-          <a:prstGeom prst="rect">
-            <a:avLst/>
-          </a:prstGeom>
-          <a:noFill/>
-        </p:spPr>
-        <p:txBody>
-          <a:bodyPr wrap="square">
-            <a:spAutoFit/>
-          </a:bodyPr>
-          <a:lstStyle/>
-          <a:p>
-            <a:pPr algn="ctr"/>
-            <a:r>
-              <a:rPr sz="4400" b="1" i="0">
+            <a:off x="640080" y="2052828"/>
+            <a:ext cx="10911535" cy="731520"/>
+          </a:xfrm>
+          <a:prstGeom prst="rect">
+            <a:avLst/>
+          </a:prstGeom>
+          <a:noFill/>
+        </p:spPr>
+        <p:txBody>
+          <a:bodyPr wrap="square">
+            <a:spAutoFit/>
+          </a:bodyPr>
+          <a:lstStyle/>
+          <a:p>
+            <a:pPr algn="ctr"/>
+            <a:r>
+              <a:rPr sz="4800" b="1" i="0">
                 <a:solidFill>
                   <a:srgbClr val="FFFFFF"/>
                 </a:solidFill>
@@ -4528,25 +4388,60 @@
         </p:nvSpPr>
         <p:spPr>
           <a:xfrm>
-            <a:off x="594360" y="2980944"/>
-            <a:ext cx="11002975" cy="347472"/>
-          </a:xfrm>
-          <a:prstGeom prst="rect">
-            <a:avLst/>
-          </a:prstGeom>
-          <a:noFill/>
-        </p:spPr>
-        <p:txBody>
-          <a:bodyPr wrap="square">
-            <a:spAutoFit/>
-          </a:bodyPr>
-          <a:lstStyle/>
-          <a:p>
-            <a:pPr algn="ctr"/>
-            <a:r>
-              <a:rPr sz="2200" b="0" i="1">
-                <a:solidFill>
-                  <a:srgbClr val="8C8C8C"/>
+            <a:off x="640080" y="2985516"/>
+            <a:ext cx="10911535" cy="731520"/>
+          </a:xfrm>
+          <a:prstGeom prst="rect">
+            <a:avLst/>
+          </a:prstGeom>
+          <a:noFill/>
+        </p:spPr>
+        <p:txBody>
+          <a:bodyPr wrap="square">
+            <a:spAutoFit/>
+          </a:bodyPr>
+          <a:lstStyle/>
+          <a:p>
+            <a:pPr algn="ctr"/>
+            <a:r>
+              <a:rPr sz="4500" b="1" i="0">
+                <a:solidFill>
+                  <a:srgbClr val="FFFFFF"/>
+                </a:solidFill>
+                <a:latin typeface="Arial"/>
+              </a:rPr>
+              <a:t>Para que nunca mais me parta de Ti</a:t>
+            </a:r>
+          </a:p>
+        </p:txBody>
+      </p:sp>
+      <p:sp>
+        <p:nvSpPr>
+          <p:cNvPr id="4" name="TextBox 3"/>
+          <p:cNvSpPr txBox="1"/>
+          <p:nvPr/>
+        </p:nvSpPr>
+        <p:spPr>
+          <a:xfrm>
+            <a:off x="640080" y="4128516"/>
+            <a:ext cx="10911535" cy="310896"/>
+          </a:xfrm>
+          <a:prstGeom prst="rect">
+            <a:avLst/>
+          </a:prstGeom>
+          <a:noFill/>
+        </p:spPr>
+        <p:txBody>
+          <a:bodyPr wrap="square">
+            <a:spAutoFit/>
+          </a:bodyPr>
+          <a:lstStyle/>
+          <a:p>
+            <a:pPr algn="ctr"/>
+            <a:r>
+              <a:rPr sz="2000" b="0" i="0">
+                <a:solidFill>
+                  <a:srgbClr val="828282"/>
                 </a:solidFill>
                 <a:latin typeface="Arial"/>
               </a:rPr>
@@ -4557,66 +4452,31 @@
       </p:sp>
       <p:sp>
         <p:nvSpPr>
-          <p:cNvPr id="4" name="TextBox 3"/>
-          <p:cNvSpPr txBox="1"/>
-          <p:nvPr/>
-        </p:nvSpPr>
-        <p:spPr>
-          <a:xfrm>
-            <a:off x="594360" y="3529584"/>
-            <a:ext cx="11002975" cy="685800"/>
-          </a:xfrm>
-          <a:prstGeom prst="rect">
-            <a:avLst/>
-          </a:prstGeom>
-          <a:noFill/>
-        </p:spPr>
-        <p:txBody>
-          <a:bodyPr wrap="square">
-            <a:spAutoFit/>
-          </a:bodyPr>
-          <a:lstStyle/>
-          <a:p>
-            <a:pPr algn="ctr"/>
-            <a:r>
-              <a:rPr sz="4141" b="1" i="0">
-                <a:solidFill>
-                  <a:srgbClr val="FFFFFF"/>
-                </a:solidFill>
-                <a:latin typeface="Arial"/>
-              </a:rPr>
-              <a:t>Para que nunca mais me parta de Ti</a:t>
-            </a:r>
-          </a:p>
-        </p:txBody>
-      </p:sp>
-      <p:sp>
-        <p:nvSpPr>
           <p:cNvPr id="5" name="TextBox 4"/>
           <p:cNvSpPr txBox="1"/>
           <p:nvPr/>
         </p:nvSpPr>
         <p:spPr>
           <a:xfrm>
-            <a:off x="594360" y="4251960"/>
-            <a:ext cx="11002975" cy="347472"/>
-          </a:xfrm>
-          <a:prstGeom prst="rect">
-            <a:avLst/>
-          </a:prstGeom>
-          <a:noFill/>
-        </p:spPr>
-        <p:txBody>
-          <a:bodyPr wrap="square">
-            <a:spAutoFit/>
-          </a:bodyPr>
-          <a:lstStyle/>
-          <a:p>
-            <a:pPr algn="ctr"/>
-            <a:r>
-              <a:rPr sz="2200" b="0" i="1">
-                <a:solidFill>
-                  <a:srgbClr val="8C8C8C"/>
+            <a:off x="640080" y="4494276"/>
+            <a:ext cx="10911535" cy="310896"/>
+          </a:xfrm>
+          <a:prstGeom prst="rect">
+            <a:avLst/>
+          </a:prstGeom>
+          <a:noFill/>
+        </p:spPr>
+        <p:txBody>
+          <a:bodyPr wrap="square">
+            <a:spAutoFit/>
+          </a:bodyPr>
+          <a:lstStyle/>
+          <a:p>
+            <a:pPr algn="ctr"/>
+            <a:r>
+              <a:rPr sz="2000" b="0" i="0">
+                <a:solidFill>
+                  <a:srgbClr val="828282"/>
                 </a:solidFill>
                 <a:latin typeface="Arial"/>
               </a:rPr>
@@ -4659,23 +4519,23 @@
         </p:nvSpPr>
         <p:spPr>
           <a:xfrm>
-            <a:off x="594360" y="2258568"/>
-            <a:ext cx="11002975" cy="685800"/>
-          </a:xfrm>
-          <a:prstGeom prst="rect">
-            <a:avLst/>
-          </a:prstGeom>
-          <a:noFill/>
-        </p:spPr>
-        <p:txBody>
-          <a:bodyPr wrap="square">
-            <a:spAutoFit/>
-          </a:bodyPr>
-          <a:lstStyle/>
-          <a:p>
-            <a:pPr algn="ctr"/>
-            <a:r>
-              <a:rPr sz="4400" b="1" i="0">
+            <a:off x="640080" y="2052828"/>
+            <a:ext cx="10911535" cy="731520"/>
+          </a:xfrm>
+          <a:prstGeom prst="rect">
+            <a:avLst/>
+          </a:prstGeom>
+          <a:noFill/>
+        </p:spPr>
+        <p:txBody>
+          <a:bodyPr wrap="square">
+            <a:spAutoFit/>
+          </a:bodyPr>
+          <a:lstStyle/>
+          <a:p>
+            <a:pPr algn="ctr"/>
+            <a:r>
+              <a:rPr sz="4800" b="1" i="0">
                 <a:solidFill>
                   <a:srgbClr val="FFFFFF"/>
                 </a:solidFill>
@@ -4694,99 +4554,29 @@
         </p:nvSpPr>
         <p:spPr>
           <a:xfrm>
-            <a:off x="594360" y="2980944"/>
-            <a:ext cx="11002975" cy="347472"/>
-          </a:xfrm>
-          <a:prstGeom prst="rect">
-            <a:avLst/>
-          </a:prstGeom>
-          <a:noFill/>
-        </p:spPr>
-        <p:txBody>
-          <a:bodyPr wrap="square">
-            <a:spAutoFit/>
-          </a:bodyPr>
-          <a:lstStyle/>
-          <a:p>
-            <a:pPr algn="ctr"/>
-            <a:r>
-              <a:rPr sz="2200" b="0" i="1">
-                <a:solidFill>
-                  <a:srgbClr val="8C8C8C"/>
-                </a:solidFill>
-                <a:latin typeface="Arial"/>
-              </a:rPr>
-              <a:t/>
-            </a:r>
-          </a:p>
-        </p:txBody>
-      </p:sp>
-      <p:sp>
-        <p:nvSpPr>
-          <p:cNvPr id="4" name="TextBox 3"/>
-          <p:cNvSpPr txBox="1"/>
-          <p:nvPr/>
-        </p:nvSpPr>
-        <p:spPr>
-          <a:xfrm>
-            <a:off x="594360" y="3529584"/>
-            <a:ext cx="11002975" cy="685800"/>
-          </a:xfrm>
-          <a:prstGeom prst="rect">
-            <a:avLst/>
-          </a:prstGeom>
-          <a:noFill/>
-        </p:spPr>
-        <p:txBody>
-          <a:bodyPr wrap="square">
-            <a:spAutoFit/>
-          </a:bodyPr>
-          <a:lstStyle/>
-          <a:p>
-            <a:pPr algn="ctr"/>
-            <a:r>
-              <a:rPr sz="4141" b="1" i="0">
+            <a:off x="640080" y="2985516"/>
+            <a:ext cx="10911535" cy="731520"/>
+          </a:xfrm>
+          <a:prstGeom prst="rect">
+            <a:avLst/>
+          </a:prstGeom>
+          <a:noFill/>
+        </p:spPr>
+        <p:txBody>
+          <a:bodyPr wrap="square">
+            <a:spAutoFit/>
+          </a:bodyPr>
+          <a:lstStyle/>
+          <a:p>
+            <a:pPr algn="ctr"/>
+            <a:r>
+              <a:rPr sz="4500" b="1" i="0">
                 <a:solidFill>
                   <a:srgbClr val="FFFFFF"/>
                 </a:solidFill>
                 <a:latin typeface="Arial"/>
               </a:rPr>
               <a:t>Para que nunca mais me parta de Ti</a:t>
-            </a:r>
-          </a:p>
-        </p:txBody>
-      </p:sp>
-      <p:sp>
-        <p:nvSpPr>
-          <p:cNvPr id="5" name="TextBox 4"/>
-          <p:cNvSpPr txBox="1"/>
-          <p:nvPr/>
-        </p:nvSpPr>
-        <p:spPr>
-          <a:xfrm>
-            <a:off x="594360" y="4251960"/>
-            <a:ext cx="11002975" cy="347472"/>
-          </a:xfrm>
-          <a:prstGeom prst="rect">
-            <a:avLst/>
-          </a:prstGeom>
-          <a:noFill/>
-        </p:spPr>
-        <p:txBody>
-          <a:bodyPr wrap="square">
-            <a:spAutoFit/>
-          </a:bodyPr>
-          <a:lstStyle/>
-          <a:p>
-            <a:pPr algn="ctr"/>
-            <a:r>
-              <a:rPr sz="2200" b="0" i="1">
-                <a:solidFill>
-                  <a:srgbClr val="8C8C8C"/>
-                </a:solidFill>
-                <a:latin typeface="Arial"/>
-              </a:rPr>
-              <a:t/>
             </a:r>
           </a:p>
         </p:txBody>
@@ -4825,23 +4615,23 @@
         </p:nvSpPr>
         <p:spPr>
           <a:xfrm>
-            <a:off x="594360" y="2258568"/>
-            <a:ext cx="11002975" cy="685800"/>
-          </a:xfrm>
-          <a:prstGeom prst="rect">
-            <a:avLst/>
-          </a:prstGeom>
-          <a:noFill/>
-        </p:spPr>
-        <p:txBody>
-          <a:bodyPr wrap="square">
-            <a:spAutoFit/>
-          </a:bodyPr>
-          <a:lstStyle/>
-          <a:p>
-            <a:pPr algn="ctr"/>
-            <a:r>
-              <a:rPr sz="4400" b="1" i="0">
+            <a:off x="640080" y="2052828"/>
+            <a:ext cx="10911535" cy="731520"/>
+          </a:xfrm>
+          <a:prstGeom prst="rect">
+            <a:avLst/>
+          </a:prstGeom>
+          <a:noFill/>
+        </p:spPr>
+        <p:txBody>
+          <a:bodyPr wrap="square">
+            <a:spAutoFit/>
+          </a:bodyPr>
+          <a:lstStyle/>
+          <a:p>
+            <a:pPr algn="ctr"/>
+            <a:r>
+              <a:rPr sz="4800" b="1" i="0">
                 <a:solidFill>
                   <a:srgbClr val="FFFFFF"/>
                 </a:solidFill>
@@ -4860,99 +4650,29 @@
         </p:nvSpPr>
         <p:spPr>
           <a:xfrm>
-            <a:off x="594360" y="2980944"/>
-            <a:ext cx="11002975" cy="347472"/>
-          </a:xfrm>
-          <a:prstGeom prst="rect">
-            <a:avLst/>
-          </a:prstGeom>
-          <a:noFill/>
-        </p:spPr>
-        <p:txBody>
-          <a:bodyPr wrap="square">
-            <a:spAutoFit/>
-          </a:bodyPr>
-          <a:lstStyle/>
-          <a:p>
-            <a:pPr algn="ctr"/>
-            <a:r>
-              <a:rPr sz="2200" b="0" i="1">
-                <a:solidFill>
-                  <a:srgbClr val="8C8C8C"/>
-                </a:solidFill>
-                <a:latin typeface="Arial"/>
-              </a:rPr>
-              <a:t/>
-            </a:r>
-          </a:p>
-        </p:txBody>
-      </p:sp>
-      <p:sp>
-        <p:nvSpPr>
-          <p:cNvPr id="4" name="TextBox 3"/>
-          <p:cNvSpPr txBox="1"/>
-          <p:nvPr/>
-        </p:nvSpPr>
-        <p:spPr>
-          <a:xfrm>
-            <a:off x="594360" y="3529584"/>
-            <a:ext cx="11002975" cy="685800"/>
-          </a:xfrm>
-          <a:prstGeom prst="rect">
-            <a:avLst/>
-          </a:prstGeom>
-          <a:noFill/>
-        </p:spPr>
-        <p:txBody>
-          <a:bodyPr wrap="square">
-            <a:spAutoFit/>
-          </a:bodyPr>
-          <a:lstStyle/>
-          <a:p>
-            <a:pPr algn="ctr"/>
-            <a:r>
-              <a:rPr sz="4141" b="1" i="0">
+            <a:off x="640080" y="2985516"/>
+            <a:ext cx="10911535" cy="731520"/>
+          </a:xfrm>
+          <a:prstGeom prst="rect">
+            <a:avLst/>
+          </a:prstGeom>
+          <a:noFill/>
+        </p:spPr>
+        <p:txBody>
+          <a:bodyPr wrap="square">
+            <a:spAutoFit/>
+          </a:bodyPr>
+          <a:lstStyle/>
+          <a:p>
+            <a:pPr algn="ctr"/>
+            <a:r>
+              <a:rPr sz="4500" b="1" i="0">
                 <a:solidFill>
                   <a:srgbClr val="FFFFFF"/>
                 </a:solidFill>
                 <a:latin typeface="Arial"/>
               </a:rPr>
               <a:t>Para que nunca mais me parta de Ti</a:t>
-            </a:r>
-          </a:p>
-        </p:txBody>
-      </p:sp>
-      <p:sp>
-        <p:nvSpPr>
-          <p:cNvPr id="5" name="TextBox 4"/>
-          <p:cNvSpPr txBox="1"/>
-          <p:nvPr/>
-        </p:nvSpPr>
-        <p:spPr>
-          <a:xfrm>
-            <a:off x="594360" y="4251960"/>
-            <a:ext cx="11002975" cy="347472"/>
-          </a:xfrm>
-          <a:prstGeom prst="rect">
-            <a:avLst/>
-          </a:prstGeom>
-          <a:noFill/>
-        </p:spPr>
-        <p:txBody>
-          <a:bodyPr wrap="square">
-            <a:spAutoFit/>
-          </a:bodyPr>
-          <a:lstStyle/>
-          <a:p>
-            <a:pPr algn="ctr"/>
-            <a:r>
-              <a:rPr sz="2200" b="0" i="1">
-                <a:solidFill>
-                  <a:srgbClr val="8C8C8C"/>
-                </a:solidFill>
-                <a:latin typeface="Arial"/>
-              </a:rPr>
-              <a:t/>
             </a:r>
           </a:p>
         </p:txBody>
@@ -4991,23 +4711,23 @@
         </p:nvSpPr>
         <p:spPr>
           <a:xfrm>
-            <a:off x="594360" y="1837944"/>
-            <a:ext cx="11002975" cy="685800"/>
-          </a:xfrm>
-          <a:prstGeom prst="rect">
-            <a:avLst/>
-          </a:prstGeom>
-          <a:noFill/>
-        </p:spPr>
-        <p:txBody>
-          <a:bodyPr wrap="square">
-            <a:spAutoFit/>
-          </a:bodyPr>
-          <a:lstStyle/>
-          <a:p>
-            <a:pPr algn="ctr"/>
-            <a:r>
-              <a:rPr sz="4400" b="1" i="0">
+            <a:off x="640080" y="1650492"/>
+            <a:ext cx="10911535" cy="731520"/>
+          </a:xfrm>
+          <a:prstGeom prst="rect">
+            <a:avLst/>
+          </a:prstGeom>
+          <a:noFill/>
+        </p:spPr>
+        <p:txBody>
+          <a:bodyPr wrap="square">
+            <a:spAutoFit/>
+          </a:bodyPr>
+          <a:lstStyle/>
+          <a:p>
+            <a:pPr algn="ctr"/>
+            <a:r>
+              <a:rPr sz="4800" b="1" i="0">
                 <a:solidFill>
                   <a:srgbClr val="FFFFFF"/>
                 </a:solidFill>
@@ -5026,8 +4746,8 @@
         </p:nvSpPr>
         <p:spPr>
           <a:xfrm>
-            <a:off x="594360" y="2560320"/>
-            <a:ext cx="11002975" cy="384048"/>
+            <a:off x="640080" y="2418588"/>
+            <a:ext cx="10911535" cy="365760"/>
           </a:xfrm>
           <a:prstGeom prst="rect">
             <a:avLst/>
@@ -5044,7 +4764,7 @@
             <a:r>
               <a:rPr sz="2400" b="0" i="1">
                 <a:solidFill>
-                  <a:srgbClr val="B4B4B4"/>
+                  <a:srgbClr val="AAAAAA"/>
                 </a:solidFill>
                 <a:latin typeface="Arial"/>
               </a:rPr>
@@ -5061,8 +4781,78 @@
         </p:nvSpPr>
         <p:spPr>
           <a:xfrm>
-            <a:off x="594360" y="2980944"/>
-            <a:ext cx="11002975" cy="347472"/>
+            <a:off x="640080" y="2985516"/>
+            <a:ext cx="10911535" cy="731520"/>
+          </a:xfrm>
+          <a:prstGeom prst="rect">
+            <a:avLst/>
+          </a:prstGeom>
+          <a:noFill/>
+        </p:spPr>
+        <p:txBody>
+          <a:bodyPr wrap="square">
+            <a:spAutoFit/>
+          </a:bodyPr>
+          <a:lstStyle/>
+          <a:p>
+            <a:pPr algn="ctr"/>
+            <a:r>
+              <a:rPr sz="4800" b="1" i="0">
+                <a:solidFill>
+                  <a:srgbClr val="FFFFFF"/>
+                </a:solidFill>
+                <a:latin typeface="Arial"/>
+              </a:rPr>
+              <a:t>あがないのあいを　たたえる歌を</a:t>
+            </a:r>
+          </a:p>
+        </p:txBody>
+      </p:sp>
+      <p:sp>
+        <p:nvSpPr>
+          <p:cNvPr id="5" name="TextBox 4"/>
+          <p:cNvSpPr txBox="1"/>
+          <p:nvPr/>
+        </p:nvSpPr>
+        <p:spPr>
+          <a:xfrm>
+            <a:off x="640080" y="3753612"/>
+            <a:ext cx="10911535" cy="365760"/>
+          </a:xfrm>
+          <a:prstGeom prst="rect">
+            <a:avLst/>
+          </a:prstGeom>
+          <a:noFill/>
+        </p:spPr>
+        <p:txBody>
+          <a:bodyPr wrap="square">
+            <a:spAutoFit/>
+          </a:bodyPr>
+          <a:lstStyle/>
+          <a:p>
+            <a:pPr algn="ctr"/>
+            <a:r>
+              <a:rPr sz="2400" b="0" i="1">
+                <a:solidFill>
+                  <a:srgbClr val="AAAAAA"/>
+                </a:solidFill>
+                <a:latin typeface="Arial"/>
+              </a:rPr>
+              <a:t>aganai no ai wo    tataeru uta wo</a:t>
+            </a:r>
+          </a:p>
+        </p:txBody>
+      </p:sp>
+      <p:sp>
+        <p:nvSpPr>
+          <p:cNvPr id="6" name="TextBox 5"/>
+          <p:cNvSpPr txBox="1"/>
+          <p:nvPr/>
+        </p:nvSpPr>
+        <p:spPr>
+          <a:xfrm>
+            <a:off x="640080" y="4530852"/>
+            <a:ext cx="10911535" cy="310896"/>
           </a:xfrm>
           <a:prstGeom prst="rect">
             <a:avLst/>
@@ -5079,7 +4869,7 @@
             <a:r>
               <a:rPr sz="2000" b="0" i="1">
                 <a:solidFill>
-                  <a:srgbClr val="8C8C8C"/>
+                  <a:srgbClr val="828282"/>
                 </a:solidFill>
                 <a:latin typeface="Arial"/>
               </a:rPr>
@@ -5090,84 +4880,14 @@
       </p:sp>
       <p:sp>
         <p:nvSpPr>
-          <p:cNvPr id="5" name="TextBox 4"/>
-          <p:cNvSpPr txBox="1"/>
-          <p:nvPr/>
-        </p:nvSpPr>
-        <p:spPr>
-          <a:xfrm>
-            <a:off x="594360" y="3529584"/>
-            <a:ext cx="11002975" cy="685800"/>
-          </a:xfrm>
-          <a:prstGeom prst="rect">
-            <a:avLst/>
-          </a:prstGeom>
-          <a:noFill/>
-        </p:spPr>
-        <p:txBody>
-          <a:bodyPr wrap="square">
-            <a:spAutoFit/>
-          </a:bodyPr>
-          <a:lstStyle/>
-          <a:p>
-            <a:pPr algn="ctr"/>
-            <a:r>
-              <a:rPr sz="4400" b="1" i="0">
-                <a:solidFill>
-                  <a:srgbClr val="FFFFFF"/>
-                </a:solidFill>
-                <a:latin typeface="Arial"/>
-              </a:rPr>
-              <a:t>あがないのあいを　たたえる歌を</a:t>
-            </a:r>
-          </a:p>
-        </p:txBody>
-      </p:sp>
-      <p:sp>
-        <p:nvSpPr>
-          <p:cNvPr id="6" name="TextBox 5"/>
-          <p:cNvSpPr txBox="1"/>
-          <p:nvPr/>
-        </p:nvSpPr>
-        <p:spPr>
-          <a:xfrm>
-            <a:off x="594360" y="4251960"/>
-            <a:ext cx="11002975" cy="384048"/>
-          </a:xfrm>
-          <a:prstGeom prst="rect">
-            <a:avLst/>
-          </a:prstGeom>
-          <a:noFill/>
-        </p:spPr>
-        <p:txBody>
-          <a:bodyPr wrap="square">
-            <a:spAutoFit/>
-          </a:bodyPr>
-          <a:lstStyle/>
-          <a:p>
-            <a:pPr algn="ctr"/>
-            <a:r>
-              <a:rPr sz="2400" b="0" i="1">
-                <a:solidFill>
-                  <a:srgbClr val="B4B4B4"/>
-                </a:solidFill>
-                <a:latin typeface="Arial"/>
-              </a:rPr>
-              <a:t>aganai no ai wo    tataeru uta wo</a:t>
-            </a:r>
-          </a:p>
-        </p:txBody>
-      </p:sp>
-      <p:sp>
-        <p:nvSpPr>
           <p:cNvPr id="7" name="TextBox 6"/>
           <p:cNvSpPr txBox="1"/>
           <p:nvPr/>
         </p:nvSpPr>
         <p:spPr>
           <a:xfrm>
-            <a:off x="594360" y="4672584"/>
-            <a:ext cx="11002975" cy="347472"/>
+            <a:off x="640080" y="4896612"/>
+            <a:ext cx="10911535" cy="310896"/>
           </a:xfrm>
           <a:prstGeom prst="rect">
             <a:avLst/>
@@ -5184,7 +4904,7 @@
             <a:r>
               <a:rPr sz="2000" b="0" i="1">
                 <a:solidFill>
-                  <a:srgbClr val="8C8C8C"/>
+                  <a:srgbClr val="828282"/>
                 </a:solidFill>
                 <a:latin typeface="Arial"/>
               </a:rPr>
@@ -5227,23 +4947,23 @@
         </p:nvSpPr>
         <p:spPr>
           <a:xfrm>
-            <a:off x="594360" y="2258568"/>
-            <a:ext cx="11002975" cy="685800"/>
-          </a:xfrm>
-          <a:prstGeom prst="rect">
-            <a:avLst/>
-          </a:prstGeom>
-          <a:noFill/>
-        </p:spPr>
-        <p:txBody>
-          <a:bodyPr wrap="square">
-            <a:spAutoFit/>
-          </a:bodyPr>
-          <a:lstStyle/>
-          <a:p>
-            <a:pPr algn="ctr"/>
-            <a:r>
-              <a:rPr sz="4400" b="1" i="0">
+            <a:off x="640080" y="2052828"/>
+            <a:ext cx="10911535" cy="731520"/>
+          </a:xfrm>
+          <a:prstGeom prst="rect">
+            <a:avLst/>
+          </a:prstGeom>
+          <a:noFill/>
+        </p:spPr>
+        <p:txBody>
+          <a:bodyPr wrap="square">
+            <a:spAutoFit/>
+          </a:bodyPr>
+          <a:lstStyle/>
+          <a:p>
+            <a:pPr algn="ctr"/>
+            <a:r>
+              <a:rPr sz="4800" b="1" i="0">
                 <a:solidFill>
                   <a:srgbClr val="FFFFFF"/>
                 </a:solidFill>
@@ -5262,25 +4982,60 @@
         </p:nvSpPr>
         <p:spPr>
           <a:xfrm>
-            <a:off x="594360" y="2980944"/>
-            <a:ext cx="11002975" cy="347472"/>
-          </a:xfrm>
-          <a:prstGeom prst="rect">
-            <a:avLst/>
-          </a:prstGeom>
-          <a:noFill/>
-        </p:spPr>
-        <p:txBody>
-          <a:bodyPr wrap="square">
-            <a:spAutoFit/>
-          </a:bodyPr>
-          <a:lstStyle/>
-          <a:p>
-            <a:pPr algn="ctr"/>
-            <a:r>
-              <a:rPr sz="2200" b="0" i="1">
-                <a:solidFill>
-                  <a:srgbClr val="8C8C8C"/>
+            <a:off x="640080" y="2985516"/>
+            <a:ext cx="10911535" cy="731520"/>
+          </a:xfrm>
+          <a:prstGeom prst="rect">
+            <a:avLst/>
+          </a:prstGeom>
+          <a:noFill/>
+        </p:spPr>
+        <p:txBody>
+          <a:bodyPr wrap="square">
+            <a:spAutoFit/>
+          </a:bodyPr>
+          <a:lstStyle/>
+          <a:p>
+            <a:pPr algn="ctr"/>
+            <a:r>
+              <a:rPr sz="4800" b="1" i="0">
+                <a:solidFill>
+                  <a:srgbClr val="FFFFFF"/>
+                </a:solidFill>
+                <a:latin typeface="Arial"/>
+              </a:rPr>
+              <a:t>Mas eu preciso mais de Ti</a:t>
+            </a:r>
+          </a:p>
+        </p:txBody>
+      </p:sp>
+      <p:sp>
+        <p:nvSpPr>
+          <p:cNvPr id="4" name="TextBox 3"/>
+          <p:cNvSpPr txBox="1"/>
+          <p:nvPr/>
+        </p:nvSpPr>
+        <p:spPr>
+          <a:xfrm>
+            <a:off x="640080" y="4128516"/>
+            <a:ext cx="10911535" cy="310896"/>
+          </a:xfrm>
+          <a:prstGeom prst="rect">
+            <a:avLst/>
+          </a:prstGeom>
+          <a:noFill/>
+        </p:spPr>
+        <p:txBody>
+          <a:bodyPr wrap="square">
+            <a:spAutoFit/>
+          </a:bodyPr>
+          <a:lstStyle/>
+          <a:p>
+            <a:pPr algn="ctr"/>
+            <a:r>
+              <a:rPr sz="2000" b="0" i="0">
+                <a:solidFill>
+                  <a:srgbClr val="828282"/>
                 </a:solidFill>
                 <a:latin typeface="Arial"/>
               </a:rPr>
@@ -5291,66 +5046,31 @@
       </p:sp>
       <p:sp>
         <p:nvSpPr>
-          <p:cNvPr id="4" name="TextBox 3"/>
-          <p:cNvSpPr txBox="1"/>
-          <p:nvPr/>
-        </p:nvSpPr>
-        <p:spPr>
-          <a:xfrm>
-            <a:off x="594360" y="3529584"/>
-            <a:ext cx="11002975" cy="685800"/>
-          </a:xfrm>
-          <a:prstGeom prst="rect">
-            <a:avLst/>
-          </a:prstGeom>
-          <a:noFill/>
-        </p:spPr>
-        <p:txBody>
-          <a:bodyPr wrap="square">
-            <a:spAutoFit/>
-          </a:bodyPr>
-          <a:lstStyle/>
-          <a:p>
-            <a:pPr algn="ctr"/>
-            <a:r>
-              <a:rPr sz="4400" b="1" i="0">
-                <a:solidFill>
-                  <a:srgbClr val="FFFFFF"/>
-                </a:solidFill>
-                <a:latin typeface="Arial"/>
-              </a:rPr>
-              <a:t>Mas eu preciso mais de Ti</a:t>
-            </a:r>
-          </a:p>
-        </p:txBody>
-      </p:sp>
-      <p:sp>
-        <p:nvSpPr>
           <p:cNvPr id="5" name="TextBox 4"/>
           <p:cNvSpPr txBox="1"/>
           <p:nvPr/>
         </p:nvSpPr>
         <p:spPr>
           <a:xfrm>
-            <a:off x="594360" y="4251960"/>
-            <a:ext cx="11002975" cy="347472"/>
-          </a:xfrm>
-          <a:prstGeom prst="rect">
-            <a:avLst/>
-          </a:prstGeom>
-          <a:noFill/>
-        </p:spPr>
-        <p:txBody>
-          <a:bodyPr wrap="square">
-            <a:spAutoFit/>
-          </a:bodyPr>
-          <a:lstStyle/>
-          <a:p>
-            <a:pPr algn="ctr"/>
-            <a:r>
-              <a:rPr sz="2200" b="0" i="1">
-                <a:solidFill>
-                  <a:srgbClr val="8C8C8C"/>
+            <a:off x="640080" y="4494276"/>
+            <a:ext cx="10911535" cy="310896"/>
+          </a:xfrm>
+          <a:prstGeom prst="rect">
+            <a:avLst/>
+          </a:prstGeom>
+          <a:noFill/>
+        </p:spPr>
+        <p:txBody>
+          <a:bodyPr wrap="square">
+            <a:spAutoFit/>
+          </a:bodyPr>
+          <a:lstStyle/>
+          <a:p>
+            <a:pPr algn="ctr"/>
+            <a:r>
+              <a:rPr sz="2000" b="0" i="0">
+                <a:solidFill>
+                  <a:srgbClr val="828282"/>
                 </a:solidFill>
                 <a:latin typeface="Arial"/>
               </a:rPr>
@@ -5393,23 +5113,23 @@
         </p:nvSpPr>
         <p:spPr>
           <a:xfrm>
-            <a:off x="594360" y="2258568"/>
-            <a:ext cx="11002975" cy="685800"/>
-          </a:xfrm>
-          <a:prstGeom prst="rect">
-            <a:avLst/>
-          </a:prstGeom>
-          <a:noFill/>
-        </p:spPr>
-        <p:txBody>
-          <a:bodyPr wrap="square">
-            <a:spAutoFit/>
-          </a:bodyPr>
-          <a:lstStyle/>
-          <a:p>
-            <a:pPr algn="ctr"/>
-            <a:r>
-              <a:rPr sz="4400" b="1" i="0">
+            <a:off x="640080" y="2052828"/>
+            <a:ext cx="10911535" cy="731520"/>
+          </a:xfrm>
+          <a:prstGeom prst="rect">
+            <a:avLst/>
+          </a:prstGeom>
+          <a:noFill/>
+        </p:spPr>
+        <p:txBody>
+          <a:bodyPr wrap="square">
+            <a:spAutoFit/>
+          </a:bodyPr>
+          <a:lstStyle/>
+          <a:p>
+            <a:pPr algn="ctr"/>
+            <a:r>
+              <a:rPr sz="4800" b="1" i="0">
                 <a:solidFill>
                   <a:srgbClr val="FFFFFF"/>
                 </a:solidFill>
@@ -5428,25 +5148,60 @@
         </p:nvSpPr>
         <p:spPr>
           <a:xfrm>
-            <a:off x="594360" y="2980944"/>
-            <a:ext cx="11002975" cy="347472"/>
-          </a:xfrm>
-          <a:prstGeom prst="rect">
-            <a:avLst/>
-          </a:prstGeom>
-          <a:noFill/>
-        </p:spPr>
-        <p:txBody>
-          <a:bodyPr wrap="square">
-            <a:spAutoFit/>
-          </a:bodyPr>
-          <a:lstStyle/>
-          <a:p>
-            <a:pPr algn="ctr"/>
-            <a:r>
-              <a:rPr sz="2200" b="0" i="1">
-                <a:solidFill>
-                  <a:srgbClr val="8C8C8C"/>
+            <a:off x="640080" y="2985516"/>
+            <a:ext cx="10911535" cy="731520"/>
+          </a:xfrm>
+          <a:prstGeom prst="rect">
+            <a:avLst/>
+          </a:prstGeom>
+          <a:noFill/>
+        </p:spPr>
+        <p:txBody>
+          <a:bodyPr wrap="square">
+            <a:spAutoFit/>
+          </a:bodyPr>
+          <a:lstStyle/>
+          <a:p>
+            <a:pPr algn="ctr"/>
+            <a:r>
+              <a:rPr sz="4800" b="1" i="0">
+                <a:solidFill>
+                  <a:srgbClr val="FFFFFF"/>
+                </a:solidFill>
+                <a:latin typeface="Arial"/>
+              </a:rPr>
+              <a:t>Que os anjos entoam em Teu reino</a:t>
+            </a:r>
+          </a:p>
+        </p:txBody>
+      </p:sp>
+      <p:sp>
+        <p:nvSpPr>
+          <p:cNvPr id="4" name="TextBox 3"/>
+          <p:cNvSpPr txBox="1"/>
+          <p:nvPr/>
+        </p:nvSpPr>
+        <p:spPr>
+          <a:xfrm>
+            <a:off x="640080" y="4128516"/>
+            <a:ext cx="10911535" cy="310896"/>
+          </a:xfrm>
+          <a:prstGeom prst="rect">
+            <a:avLst/>
+          </a:prstGeom>
+          <a:noFill/>
+        </p:spPr>
+        <p:txBody>
+          <a:bodyPr wrap="square">
+            <a:spAutoFit/>
+          </a:bodyPr>
+          <a:lstStyle/>
+          <a:p>
+            <a:pPr algn="ctr"/>
+            <a:r>
+              <a:rPr sz="2000" b="0" i="0">
+                <a:solidFill>
+                  <a:srgbClr val="828282"/>
                 </a:solidFill>
                 <a:latin typeface="Arial"/>
               </a:rPr>
@@ -5457,66 +5212,31 @@
       </p:sp>
       <p:sp>
         <p:nvSpPr>
-          <p:cNvPr id="4" name="TextBox 3"/>
-          <p:cNvSpPr txBox="1"/>
-          <p:nvPr/>
-        </p:nvSpPr>
-        <p:spPr>
-          <a:xfrm>
-            <a:off x="594360" y="3529584"/>
-            <a:ext cx="11002975" cy="685800"/>
-          </a:xfrm>
-          <a:prstGeom prst="rect">
-            <a:avLst/>
-          </a:prstGeom>
-          <a:noFill/>
-        </p:spPr>
-        <p:txBody>
-          <a:bodyPr wrap="square">
-            <a:spAutoFit/>
-          </a:bodyPr>
-          <a:lstStyle/>
-          <a:p>
-            <a:pPr algn="ctr"/>
-            <a:r>
-              <a:rPr sz="4400" b="1" i="0">
-                <a:solidFill>
-                  <a:srgbClr val="FFFFFF"/>
-                </a:solidFill>
-                <a:latin typeface="Arial"/>
-              </a:rPr>
-              <a:t>Que os anjos entoam em Teu reino</a:t>
-            </a:r>
-          </a:p>
-        </p:txBody>
-      </p:sp>
-      <p:sp>
-        <p:nvSpPr>
           <p:cNvPr id="5" name="TextBox 4"/>
           <p:cNvSpPr txBox="1"/>
           <p:nvPr/>
         </p:nvSpPr>
         <p:spPr>
           <a:xfrm>
-            <a:off x="594360" y="4251960"/>
-            <a:ext cx="11002975" cy="347472"/>
-          </a:xfrm>
-          <a:prstGeom prst="rect">
-            <a:avLst/>
-          </a:prstGeom>
-          <a:noFill/>
-        </p:spPr>
-        <p:txBody>
-          <a:bodyPr wrap="square">
-            <a:spAutoFit/>
-          </a:bodyPr>
-          <a:lstStyle/>
-          <a:p>
-            <a:pPr algn="ctr"/>
-            <a:r>
-              <a:rPr sz="2200" b="0" i="1">
-                <a:solidFill>
-                  <a:srgbClr val="8C8C8C"/>
+            <a:off x="640080" y="4494276"/>
+            <a:ext cx="10911535" cy="310896"/>
+          </a:xfrm>
+          <a:prstGeom prst="rect">
+            <a:avLst/>
+          </a:prstGeom>
+          <a:noFill/>
+        </p:spPr>
+        <p:txBody>
+          <a:bodyPr wrap="square">
+            <a:spAutoFit/>
+          </a:bodyPr>
+          <a:lstStyle/>
+          <a:p>
+            <a:pPr algn="ctr"/>
+            <a:r>
+              <a:rPr sz="2000" b="0" i="0">
+                <a:solidFill>
+                  <a:srgbClr val="828282"/>
                 </a:solidFill>
                 <a:latin typeface="Arial"/>
               </a:rPr>
@@ -5559,23 +5279,23 @@
         </p:nvSpPr>
         <p:spPr>
           <a:xfrm>
-            <a:off x="594360" y="2258568"/>
-            <a:ext cx="11002975" cy="685800"/>
-          </a:xfrm>
-          <a:prstGeom prst="rect">
-            <a:avLst/>
-          </a:prstGeom>
-          <a:noFill/>
-        </p:spPr>
-        <p:txBody>
-          <a:bodyPr wrap="square">
-            <a:spAutoFit/>
-          </a:bodyPr>
-          <a:lstStyle/>
-          <a:p>
-            <a:pPr algn="ctr"/>
-            <a:r>
-              <a:rPr sz="4400" b="1" i="0">
+            <a:off x="640080" y="2052828"/>
+            <a:ext cx="10911535" cy="731520"/>
+          </a:xfrm>
+          <a:prstGeom prst="rect">
+            <a:avLst/>
+          </a:prstGeom>
+          <a:noFill/>
+        </p:spPr>
+        <p:txBody>
+          <a:bodyPr wrap="square">
+            <a:spAutoFit/>
+          </a:bodyPr>
+          <a:lstStyle/>
+          <a:p>
+            <a:pPr algn="ctr"/>
+            <a:r>
+              <a:rPr sz="4800" b="1" i="0">
                 <a:solidFill>
                   <a:srgbClr val="FFFFFF"/>
                 </a:solidFill>
@@ -5594,99 +5314,29 @@
         </p:nvSpPr>
         <p:spPr>
           <a:xfrm>
-            <a:off x="594360" y="2980944"/>
-            <a:ext cx="11002975" cy="347472"/>
-          </a:xfrm>
-          <a:prstGeom prst="rect">
-            <a:avLst/>
-          </a:prstGeom>
-          <a:noFill/>
-        </p:spPr>
-        <p:txBody>
-          <a:bodyPr wrap="square">
-            <a:spAutoFit/>
-          </a:bodyPr>
-          <a:lstStyle/>
-          <a:p>
-            <a:pPr algn="ctr"/>
-            <a:r>
-              <a:rPr sz="2200" b="0" i="1">
-                <a:solidFill>
-                  <a:srgbClr val="8C8C8C"/>
-                </a:solidFill>
-                <a:latin typeface="Arial"/>
-              </a:rPr>
-              <a:t/>
-            </a:r>
-          </a:p>
-        </p:txBody>
-      </p:sp>
-      <p:sp>
-        <p:nvSpPr>
-          <p:cNvPr id="4" name="TextBox 3"/>
-          <p:cNvSpPr txBox="1"/>
-          <p:nvPr/>
-        </p:nvSpPr>
-        <p:spPr>
-          <a:xfrm>
-            <a:off x="594360" y="3529584"/>
-            <a:ext cx="11002975" cy="685800"/>
-          </a:xfrm>
-          <a:prstGeom prst="rect">
-            <a:avLst/>
-          </a:prstGeom>
-          <a:noFill/>
-        </p:spPr>
-        <p:txBody>
-          <a:bodyPr wrap="square">
-            <a:spAutoFit/>
-          </a:bodyPr>
-          <a:lstStyle/>
-          <a:p>
-            <a:pPr algn="ctr"/>
-            <a:r>
-              <a:rPr sz="4400" b="1" i="0">
+            <a:off x="640080" y="2985516"/>
+            <a:ext cx="10911535" cy="731520"/>
+          </a:xfrm>
+          <a:prstGeom prst="rect">
+            <a:avLst/>
+          </a:prstGeom>
+          <a:noFill/>
+        </p:spPr>
+        <p:txBody>
+          <a:bodyPr wrap="square">
+            <a:spAutoFit/>
+          </a:bodyPr>
+          <a:lstStyle/>
+          <a:p>
+            <a:pPr algn="ctr"/>
+            <a:r>
+              <a:rPr sz="4800" b="1" i="0">
                 <a:solidFill>
                   <a:srgbClr val="FFFFFF"/>
                 </a:solidFill>
                 <a:latin typeface="Arial"/>
               </a:rPr>
               <a:t>Aleluia! Sou do Senhor!</a:t>
-            </a:r>
-          </a:p>
-        </p:txBody>
-      </p:sp>
-      <p:sp>
-        <p:nvSpPr>
-          <p:cNvPr id="5" name="TextBox 4"/>
-          <p:cNvSpPr txBox="1"/>
-          <p:nvPr/>
-        </p:nvSpPr>
-        <p:spPr>
-          <a:xfrm>
-            <a:off x="594360" y="4251960"/>
-            <a:ext cx="11002975" cy="347472"/>
-          </a:xfrm>
-          <a:prstGeom prst="rect">
-            <a:avLst/>
-          </a:prstGeom>
-          <a:noFill/>
-        </p:spPr>
-        <p:txBody>
-          <a:bodyPr wrap="square">
-            <a:spAutoFit/>
-          </a:bodyPr>
-          <a:lstStyle/>
-          <a:p>
-            <a:pPr algn="ctr"/>
-            <a:r>
-              <a:rPr sz="2200" b="0" i="1">
-                <a:solidFill>
-                  <a:srgbClr val="8C8C8C"/>
-                </a:solidFill>
-                <a:latin typeface="Arial"/>
-              </a:rPr>
-              <a:t/>
             </a:r>
           </a:p>
         </p:txBody>
@@ -5725,23 +5375,23 @@
         </p:nvSpPr>
         <p:spPr>
           <a:xfrm>
-            <a:off x="594360" y="2258568"/>
-            <a:ext cx="11002975" cy="685800"/>
-          </a:xfrm>
-          <a:prstGeom prst="rect">
-            <a:avLst/>
-          </a:prstGeom>
-          <a:noFill/>
-        </p:spPr>
-        <p:txBody>
-          <a:bodyPr wrap="square">
-            <a:spAutoFit/>
-          </a:bodyPr>
-          <a:lstStyle/>
-          <a:p>
-            <a:pPr algn="ctr"/>
-            <a:r>
-              <a:rPr sz="4400" b="1" i="0">
+            <a:off x="640080" y="2052828"/>
+            <a:ext cx="10911535" cy="731520"/>
+          </a:xfrm>
+          <a:prstGeom prst="rect">
+            <a:avLst/>
+          </a:prstGeom>
+          <a:noFill/>
+        </p:spPr>
+        <p:txBody>
+          <a:bodyPr wrap="square">
+            <a:spAutoFit/>
+          </a:bodyPr>
+          <a:lstStyle/>
+          <a:p>
+            <a:pPr algn="ctr"/>
+            <a:r>
+              <a:rPr sz="4800" b="1" i="0">
                 <a:solidFill>
                   <a:srgbClr val="FFFFFF"/>
                 </a:solidFill>
@@ -5760,99 +5410,29 @@
         </p:nvSpPr>
         <p:spPr>
           <a:xfrm>
-            <a:off x="594360" y="2980944"/>
-            <a:ext cx="11002975" cy="347472"/>
-          </a:xfrm>
-          <a:prstGeom prst="rect">
-            <a:avLst/>
-          </a:prstGeom>
-          <a:noFill/>
-        </p:spPr>
-        <p:txBody>
-          <a:bodyPr wrap="square">
-            <a:spAutoFit/>
-          </a:bodyPr>
-          <a:lstStyle/>
-          <a:p>
-            <a:pPr algn="ctr"/>
-            <a:r>
-              <a:rPr sz="2200" b="0" i="1">
-                <a:solidFill>
-                  <a:srgbClr val="8C8C8C"/>
-                </a:solidFill>
-                <a:latin typeface="Arial"/>
-              </a:rPr>
-              <a:t/>
-            </a:r>
-          </a:p>
-        </p:txBody>
-      </p:sp>
-      <p:sp>
-        <p:nvSpPr>
-          <p:cNvPr id="4" name="TextBox 3"/>
-          <p:cNvSpPr txBox="1"/>
-          <p:nvPr/>
-        </p:nvSpPr>
-        <p:spPr>
-          <a:xfrm>
-            <a:off x="594360" y="3529584"/>
-            <a:ext cx="11002975" cy="685800"/>
-          </a:xfrm>
-          <a:prstGeom prst="rect">
-            <a:avLst/>
-          </a:prstGeom>
-          <a:noFill/>
-        </p:spPr>
-        <p:txBody>
-          <a:bodyPr wrap="square">
-            <a:spAutoFit/>
-          </a:bodyPr>
-          <a:lstStyle/>
-          <a:p>
-            <a:pPr algn="ctr"/>
-            <a:r>
-              <a:rPr sz="4400" b="1" i="0">
+            <a:off x="640080" y="2985516"/>
+            <a:ext cx="10911535" cy="731520"/>
+          </a:xfrm>
+          <a:prstGeom prst="rect">
+            <a:avLst/>
+          </a:prstGeom>
+          <a:noFill/>
+        </p:spPr>
+        <p:txBody>
+          <a:bodyPr wrap="square">
+            <a:spAutoFit/>
+          </a:bodyPr>
+          <a:lstStyle/>
+          <a:p>
+            <a:pPr algn="ctr"/>
+            <a:r>
+              <a:rPr sz="4800" b="1" i="0">
                 <a:solidFill>
                   <a:srgbClr val="FFFFFF"/>
                 </a:solidFill>
                 <a:latin typeface="Arial"/>
               </a:rPr>
               <a:t>E Tua graça ainda me guia</a:t>
-            </a:r>
-          </a:p>
-        </p:txBody>
-      </p:sp>
-      <p:sp>
-        <p:nvSpPr>
-          <p:cNvPr id="5" name="TextBox 4"/>
-          <p:cNvSpPr txBox="1"/>
-          <p:nvPr/>
-        </p:nvSpPr>
-        <p:spPr>
-          <a:xfrm>
-            <a:off x="594360" y="4251960"/>
-            <a:ext cx="11002975" cy="347472"/>
-          </a:xfrm>
-          <a:prstGeom prst="rect">
-            <a:avLst/>
-          </a:prstGeom>
-          <a:noFill/>
-        </p:spPr>
-        <p:txBody>
-          <a:bodyPr wrap="square">
-            <a:spAutoFit/>
-          </a:bodyPr>
-          <a:lstStyle/>
-          <a:p>
-            <a:pPr algn="ctr"/>
-            <a:r>
-              <a:rPr sz="2200" b="0" i="1">
-                <a:solidFill>
-                  <a:srgbClr val="8C8C8C"/>
-                </a:solidFill>
-                <a:latin typeface="Arial"/>
-              </a:rPr>
-              <a:t/>
             </a:r>
           </a:p>
         </p:txBody>
@@ -5891,23 +5471,23 @@
         </p:nvSpPr>
         <p:spPr>
           <a:xfrm>
-            <a:off x="594360" y="1837944"/>
-            <a:ext cx="11002975" cy="685800"/>
-          </a:xfrm>
-          <a:prstGeom prst="rect">
-            <a:avLst/>
-          </a:prstGeom>
-          <a:noFill/>
-        </p:spPr>
-        <p:txBody>
-          <a:bodyPr wrap="square">
-            <a:spAutoFit/>
-          </a:bodyPr>
-          <a:lstStyle/>
-          <a:p>
-            <a:pPr algn="ctr"/>
-            <a:r>
-              <a:rPr sz="3911" b="1" i="0">
+            <a:off x="640080" y="1650492"/>
+            <a:ext cx="10911535" cy="731520"/>
+          </a:xfrm>
+          <a:prstGeom prst="rect">
+            <a:avLst/>
+          </a:prstGeom>
+          <a:noFill/>
+        </p:spPr>
+        <p:txBody>
+          <a:bodyPr wrap="square">
+            <a:spAutoFit/>
+          </a:bodyPr>
+          <a:lstStyle/>
+          <a:p>
+            <a:pPr algn="ctr"/>
+            <a:r>
+              <a:rPr sz="4200" b="1" i="0">
                 <a:solidFill>
                   <a:srgbClr val="FFFFFF"/>
                 </a:solidFill>
@@ -5926,8 +5506,8 @@
         </p:nvSpPr>
         <p:spPr>
           <a:xfrm>
-            <a:off x="594360" y="2560320"/>
-            <a:ext cx="11002975" cy="384048"/>
+            <a:off x="640080" y="2418588"/>
+            <a:ext cx="10911535" cy="365760"/>
           </a:xfrm>
           <a:prstGeom prst="rect">
             <a:avLst/>
@@ -5944,7 +5524,7 @@
             <a:r>
               <a:rPr sz="2400" b="0" i="1">
                 <a:solidFill>
-                  <a:srgbClr val="B4B4B4"/>
+                  <a:srgbClr val="AAAAAA"/>
                 </a:solidFill>
                 <a:latin typeface="Arial"/>
               </a:rPr>
@@ -5961,8 +5541,78 @@
         </p:nvSpPr>
         <p:spPr>
           <a:xfrm>
-            <a:off x="594360" y="2980944"/>
-            <a:ext cx="11002975" cy="347472"/>
+            <a:off x="640080" y="2985516"/>
+            <a:ext cx="10911535" cy="731520"/>
+          </a:xfrm>
+          <a:prstGeom prst="rect">
+            <a:avLst/>
+          </a:prstGeom>
+          <a:noFill/>
+        </p:spPr>
+        <p:txBody>
+          <a:bodyPr wrap="square">
+            <a:spAutoFit/>
+          </a:bodyPr>
+          <a:lstStyle/>
+          <a:p>
+            <a:pPr algn="ctr"/>
+            <a:r>
+              <a:rPr sz="4200" b="1" i="0">
+                <a:solidFill>
+                  <a:srgbClr val="FFFFFF"/>
+                </a:solidFill>
+                <a:latin typeface="Arial"/>
+              </a:rPr>
+              <a:t>恵みで        御くにへ   みちびき  たまえ</a:t>
+            </a:r>
+          </a:p>
+        </p:txBody>
+      </p:sp>
+      <p:sp>
+        <p:nvSpPr>
+          <p:cNvPr id="5" name="TextBox 4"/>
+          <p:cNvSpPr txBox="1"/>
+          <p:nvPr/>
+        </p:nvSpPr>
+        <p:spPr>
+          <a:xfrm>
+            <a:off x="640080" y="3753612"/>
+            <a:ext cx="10911535" cy="365760"/>
+          </a:xfrm>
+          <a:prstGeom prst="rect">
+            <a:avLst/>
+          </a:prstGeom>
+          <a:noFill/>
+        </p:spPr>
+        <p:txBody>
+          <a:bodyPr wrap="square">
+            <a:spAutoFit/>
+          </a:bodyPr>
+          <a:lstStyle/>
+          <a:p>
+            <a:pPr algn="ctr"/>
+            <a:r>
+              <a:rPr sz="2400" b="0" i="1">
+                <a:solidFill>
+                  <a:srgbClr val="AAAAAA"/>
+                </a:solidFill>
+                <a:latin typeface="Arial"/>
+              </a:rPr>
+              <a:t>megumi de mikuni he  michibiki tamae</a:t>
+            </a:r>
+          </a:p>
+        </p:txBody>
+      </p:sp>
+      <p:sp>
+        <p:nvSpPr>
+          <p:cNvPr id="6" name="TextBox 5"/>
+          <p:cNvSpPr txBox="1"/>
+          <p:nvPr/>
+        </p:nvSpPr>
+        <p:spPr>
+          <a:xfrm>
+            <a:off x="640080" y="4530852"/>
+            <a:ext cx="10911535" cy="310896"/>
           </a:xfrm>
           <a:prstGeom prst="rect">
             <a:avLst/>
@@ -5979,7 +5629,7 @@
             <a:r>
               <a:rPr sz="2000" b="0" i="1">
                 <a:solidFill>
-                  <a:srgbClr val="8C8C8C"/>
+                  <a:srgbClr val="828282"/>
                 </a:solidFill>
                 <a:latin typeface="Arial"/>
               </a:rPr>
@@ -5990,84 +5640,14 @@
       </p:sp>
       <p:sp>
         <p:nvSpPr>
-          <p:cNvPr id="5" name="TextBox 4"/>
-          <p:cNvSpPr txBox="1"/>
-          <p:nvPr/>
-        </p:nvSpPr>
-        <p:spPr>
-          <a:xfrm>
-            <a:off x="594360" y="3529584"/>
-            <a:ext cx="11002975" cy="685800"/>
-          </a:xfrm>
-          <a:prstGeom prst="rect">
-            <a:avLst/>
-          </a:prstGeom>
-          <a:noFill/>
-        </p:spPr>
-        <p:txBody>
-          <a:bodyPr wrap="square">
-            <a:spAutoFit/>
-          </a:bodyPr>
-          <a:lstStyle/>
-          <a:p>
-            <a:pPr algn="ctr"/>
-            <a:r>
-              <a:rPr sz="3911" b="1" i="0">
-                <a:solidFill>
-                  <a:srgbClr val="FFFFFF"/>
-                </a:solidFill>
-                <a:latin typeface="Arial"/>
-              </a:rPr>
-              <a:t>恵みで        御くにへ   みちびき  たまえ</a:t>
-            </a:r>
-          </a:p>
-        </p:txBody>
-      </p:sp>
-      <p:sp>
-        <p:nvSpPr>
-          <p:cNvPr id="6" name="TextBox 5"/>
-          <p:cNvSpPr txBox="1"/>
-          <p:nvPr/>
-        </p:nvSpPr>
-        <p:spPr>
-          <a:xfrm>
-            <a:off x="594360" y="4251960"/>
-            <a:ext cx="11002975" cy="384048"/>
-          </a:xfrm>
-          <a:prstGeom prst="rect">
-            <a:avLst/>
-          </a:prstGeom>
-          <a:noFill/>
-        </p:spPr>
-        <p:txBody>
-          <a:bodyPr wrap="square">
-            <a:spAutoFit/>
-          </a:bodyPr>
-          <a:lstStyle/>
-          <a:p>
-            <a:pPr algn="ctr"/>
-            <a:r>
-              <a:rPr sz="2400" b="0" i="1">
-                <a:solidFill>
-                  <a:srgbClr val="B4B4B4"/>
-                </a:solidFill>
-                <a:latin typeface="Arial"/>
-              </a:rPr>
-              <a:t>megumi de mikuni he  michibiki tamae</a:t>
-            </a:r>
-          </a:p>
-        </p:txBody>
-      </p:sp>
-      <p:sp>
-        <p:nvSpPr>
           <p:cNvPr id="7" name="TextBox 6"/>
           <p:cNvSpPr txBox="1"/>
           <p:nvPr/>
         </p:nvSpPr>
         <p:spPr>
           <a:xfrm>
-            <a:off x="594360" y="4672584"/>
-            <a:ext cx="11002975" cy="347472"/>
+            <a:off x="640080" y="4896612"/>
+            <a:ext cx="10911535" cy="310896"/>
           </a:xfrm>
           <a:prstGeom prst="rect">
             <a:avLst/>
@@ -6084,7 +5664,7 @@
             <a:r>
               <a:rPr sz="2000" b="0" i="1">
                 <a:solidFill>
-                  <a:srgbClr val="8C8C8C"/>
+                  <a:srgbClr val="828282"/>
                 </a:solidFill>
                 <a:latin typeface="Arial"/>
               </a:rPr>
@@ -6127,23 +5707,23 @@
         </p:nvSpPr>
         <p:spPr>
           <a:xfrm>
-            <a:off x="594360" y="1837944"/>
-            <a:ext cx="11002975" cy="685800"/>
-          </a:xfrm>
-          <a:prstGeom prst="rect">
-            <a:avLst/>
-          </a:prstGeom>
-          <a:noFill/>
-        </p:spPr>
-        <p:txBody>
-          <a:bodyPr wrap="square">
-            <a:spAutoFit/>
-          </a:bodyPr>
-          <a:lstStyle/>
-          <a:p>
-            <a:pPr algn="ctr"/>
-            <a:r>
-              <a:rPr sz="4400" b="1" i="0">
+            <a:off x="640080" y="1650492"/>
+            <a:ext cx="10911535" cy="731520"/>
+          </a:xfrm>
+          <a:prstGeom prst="rect">
+            <a:avLst/>
+          </a:prstGeom>
+          <a:noFill/>
+        </p:spPr>
+        <p:txBody>
+          <a:bodyPr wrap="square">
+            <a:spAutoFit/>
+          </a:bodyPr>
+          <a:lstStyle/>
+          <a:p>
+            <a:pPr algn="ctr"/>
+            <a:r>
+              <a:rPr sz="4800" b="1" i="0">
                 <a:solidFill>
                   <a:srgbClr val="FFFFFF"/>
                 </a:solidFill>
@@ -6162,8 +5742,8 @@
         </p:nvSpPr>
         <p:spPr>
           <a:xfrm>
-            <a:off x="594360" y="2560320"/>
-            <a:ext cx="11002975" cy="384048"/>
+            <a:off x="640080" y="2418588"/>
+            <a:ext cx="10911535" cy="365760"/>
           </a:xfrm>
           <a:prstGeom prst="rect">
             <a:avLst/>
@@ -6180,7 +5760,7 @@
             <a:r>
               <a:rPr sz="2400" b="0" i="1">
                 <a:solidFill>
-                  <a:srgbClr val="B4B4B4"/>
+                  <a:srgbClr val="AAAAAA"/>
                 </a:solidFill>
                 <a:latin typeface="Arial"/>
               </a:rPr>
@@ -6197,8 +5777,78 @@
         </p:nvSpPr>
         <p:spPr>
           <a:xfrm>
-            <a:off x="594360" y="2980944"/>
-            <a:ext cx="11002975" cy="347472"/>
+            <a:off x="640080" y="2985516"/>
+            <a:ext cx="10911535" cy="731520"/>
+          </a:xfrm>
+          <a:prstGeom prst="rect">
+            <a:avLst/>
+          </a:prstGeom>
+          <a:noFill/>
+        </p:spPr>
+        <p:txBody>
+          <a:bodyPr wrap="square">
+            <a:spAutoFit/>
+          </a:bodyPr>
+          <a:lstStyle/>
+          <a:p>
+            <a:pPr algn="ctr"/>
+            <a:r>
+              <a:rPr sz="4800" b="1" i="0">
+                <a:solidFill>
+                  <a:srgbClr val="FFFFFF"/>
+                </a:solidFill>
+                <a:latin typeface="Arial"/>
+              </a:rPr>
+              <a:t>十字架の血により あがないたもう</a:t>
+            </a:r>
+          </a:p>
+        </p:txBody>
+      </p:sp>
+      <p:sp>
+        <p:nvSpPr>
+          <p:cNvPr id="5" name="TextBox 4"/>
+          <p:cNvSpPr txBox="1"/>
+          <p:nvPr/>
+        </p:nvSpPr>
+        <p:spPr>
+          <a:xfrm>
+            <a:off x="640080" y="3753612"/>
+            <a:ext cx="10911535" cy="365760"/>
+          </a:xfrm>
+          <a:prstGeom prst="rect">
+            <a:avLst/>
+          </a:prstGeom>
+          <a:noFill/>
+        </p:spPr>
+        <p:txBody>
+          <a:bodyPr wrap="square">
+            <a:spAutoFit/>
+          </a:bodyPr>
+          <a:lstStyle/>
+          <a:p>
+            <a:pPr algn="ctr"/>
+            <a:r>
+              <a:rPr sz="2400" b="0" i="1">
+                <a:solidFill>
+                  <a:srgbClr val="AAAAAA"/>
+                </a:solidFill>
+                <a:latin typeface="Arial"/>
+              </a:rPr>
+              <a:t>juujika no chi ni yori aganai tamou</a:t>
+            </a:r>
+          </a:p>
+        </p:txBody>
+      </p:sp>
+      <p:sp>
+        <p:nvSpPr>
+          <p:cNvPr id="6" name="TextBox 5"/>
+          <p:cNvSpPr txBox="1"/>
+          <p:nvPr/>
+        </p:nvSpPr>
+        <p:spPr>
+          <a:xfrm>
+            <a:off x="640080" y="4530852"/>
+            <a:ext cx="10911535" cy="310896"/>
           </a:xfrm>
           <a:prstGeom prst="rect">
             <a:avLst/>
@@ -6215,7 +5865,7 @@
             <a:r>
               <a:rPr sz="2000" b="0" i="1">
                 <a:solidFill>
-                  <a:srgbClr val="8C8C8C"/>
+                  <a:srgbClr val="828282"/>
                 </a:solidFill>
                 <a:latin typeface="Arial"/>
               </a:rPr>
@@ -6226,84 +5876,14 @@
       </p:sp>
       <p:sp>
         <p:nvSpPr>
-          <p:cNvPr id="5" name="TextBox 4"/>
-          <p:cNvSpPr txBox="1"/>
-          <p:nvPr/>
-        </p:nvSpPr>
-        <p:spPr>
-          <a:xfrm>
-            <a:off x="594360" y="3529584"/>
-            <a:ext cx="11002975" cy="685800"/>
-          </a:xfrm>
-          <a:prstGeom prst="rect">
-            <a:avLst/>
-          </a:prstGeom>
-          <a:noFill/>
-        </p:spPr>
-        <p:txBody>
-          <a:bodyPr wrap="square">
-            <a:spAutoFit/>
-          </a:bodyPr>
-          <a:lstStyle/>
-          <a:p>
-            <a:pPr algn="ctr"/>
-            <a:r>
-              <a:rPr sz="4400" b="1" i="0">
-                <a:solidFill>
-                  <a:srgbClr val="FFFFFF"/>
-                </a:solidFill>
-                <a:latin typeface="Arial"/>
-              </a:rPr>
-              <a:t>十字架の血により あがないたもう</a:t>
-            </a:r>
-          </a:p>
-        </p:txBody>
-      </p:sp>
-      <p:sp>
-        <p:nvSpPr>
-          <p:cNvPr id="6" name="TextBox 5"/>
-          <p:cNvSpPr txBox="1"/>
-          <p:nvPr/>
-        </p:nvSpPr>
-        <p:spPr>
-          <a:xfrm>
-            <a:off x="594360" y="4251960"/>
-            <a:ext cx="11002975" cy="384048"/>
-          </a:xfrm>
-          <a:prstGeom prst="rect">
-            <a:avLst/>
-          </a:prstGeom>
-          <a:noFill/>
-        </p:spPr>
-        <p:txBody>
-          <a:bodyPr wrap="square">
-            <a:spAutoFit/>
-          </a:bodyPr>
-          <a:lstStyle/>
-          <a:p>
-            <a:pPr algn="ctr"/>
-            <a:r>
-              <a:rPr sz="2400" b="0" i="1">
-                <a:solidFill>
-                  <a:srgbClr val="B4B4B4"/>
-                </a:solidFill>
-                <a:latin typeface="Arial"/>
-              </a:rPr>
-              <a:t>juujika no chi ni yori aganai tamou</a:t>
-            </a:r>
-          </a:p>
-        </p:txBody>
-      </p:sp>
-      <p:sp>
-        <p:nvSpPr>
           <p:cNvPr id="7" name="TextBox 6"/>
           <p:cNvSpPr txBox="1"/>
           <p:nvPr/>
         </p:nvSpPr>
         <p:spPr>
           <a:xfrm>
-            <a:off x="594360" y="4672584"/>
-            <a:ext cx="11002975" cy="347472"/>
+            <a:off x="640080" y="4896612"/>
+            <a:ext cx="10911535" cy="310896"/>
           </a:xfrm>
           <a:prstGeom prst="rect">
             <a:avLst/>
@@ -6320,7 +5900,7 @@
             <a:r>
               <a:rPr sz="2000" b="0" i="1">
                 <a:solidFill>
-                  <a:srgbClr val="8C8C8C"/>
+                  <a:srgbClr val="828282"/>
                 </a:solidFill>
                 <a:latin typeface="Arial"/>
               </a:rPr>
@@ -6363,23 +5943,23 @@
         </p:nvSpPr>
         <p:spPr>
           <a:xfrm>
-            <a:off x="594360" y="2258568"/>
-            <a:ext cx="11002975" cy="685800"/>
-          </a:xfrm>
-          <a:prstGeom prst="rect">
-            <a:avLst/>
-          </a:prstGeom>
-          <a:noFill/>
-        </p:spPr>
-        <p:txBody>
-          <a:bodyPr wrap="square">
-            <a:spAutoFit/>
-          </a:bodyPr>
-          <a:lstStyle/>
-          <a:p>
-            <a:pPr algn="ctr"/>
-            <a:r>
-              <a:rPr sz="4400" b="1" i="0">
+            <a:off x="640080" y="2052828"/>
+            <a:ext cx="10911535" cy="731520"/>
+          </a:xfrm>
+          <a:prstGeom prst="rect">
+            <a:avLst/>
+          </a:prstGeom>
+          <a:noFill/>
+        </p:spPr>
+        <p:txBody>
+          <a:bodyPr wrap="square">
+            <a:spAutoFit/>
+          </a:bodyPr>
+          <a:lstStyle/>
+          <a:p>
+            <a:pPr algn="ctr"/>
+            <a:r>
+              <a:rPr sz="4800" b="1" i="0">
                 <a:solidFill>
                   <a:srgbClr val="FFFFFF"/>
                 </a:solidFill>
@@ -6398,25 +5978,60 @@
         </p:nvSpPr>
         <p:spPr>
           <a:xfrm>
-            <a:off x="594360" y="2980944"/>
-            <a:ext cx="11002975" cy="347472"/>
-          </a:xfrm>
-          <a:prstGeom prst="rect">
-            <a:avLst/>
-          </a:prstGeom>
-          <a:noFill/>
-        </p:spPr>
-        <p:txBody>
-          <a:bodyPr wrap="square">
-            <a:spAutoFit/>
-          </a:bodyPr>
-          <a:lstStyle/>
-          <a:p>
-            <a:pPr algn="ctr"/>
-            <a:r>
-              <a:rPr sz="2200" b="0" i="1">
-                <a:solidFill>
-                  <a:srgbClr val="8C8C8C"/>
+            <a:off x="640080" y="2985516"/>
+            <a:ext cx="10911535" cy="731520"/>
+          </a:xfrm>
+          <a:prstGeom prst="rect">
+            <a:avLst/>
+          </a:prstGeom>
+          <a:noFill/>
+        </p:spPr>
+        <p:txBody>
+          <a:bodyPr wrap="square">
+            <a:spAutoFit/>
+          </a:bodyPr>
+          <a:lstStyle/>
+          <a:p>
+            <a:pPr algn="ctr"/>
+            <a:r>
+              <a:rPr sz="4800" b="1" i="0">
+                <a:solidFill>
+                  <a:srgbClr val="FFFFFF"/>
+                </a:solidFill>
+                <a:latin typeface="Arial"/>
+              </a:rPr>
+              <a:t>Ao laço do Teu amor tão pleno</a:t>
+            </a:r>
+          </a:p>
+        </p:txBody>
+      </p:sp>
+      <p:sp>
+        <p:nvSpPr>
+          <p:cNvPr id="4" name="TextBox 3"/>
+          <p:cNvSpPr txBox="1"/>
+          <p:nvPr/>
+        </p:nvSpPr>
+        <p:spPr>
+          <a:xfrm>
+            <a:off x="640080" y="4128516"/>
+            <a:ext cx="10911535" cy="310896"/>
+          </a:xfrm>
+          <a:prstGeom prst="rect">
+            <a:avLst/>
+          </a:prstGeom>
+          <a:noFill/>
+        </p:spPr>
+        <p:txBody>
+          <a:bodyPr wrap="square">
+            <a:spAutoFit/>
+          </a:bodyPr>
+          <a:lstStyle/>
+          <a:p>
+            <a:pPr algn="ctr"/>
+            <a:r>
+              <a:rPr sz="2000" b="0" i="0">
+                <a:solidFill>
+                  <a:srgbClr val="828282"/>
                 </a:solidFill>
                 <a:latin typeface="Arial"/>
               </a:rPr>
@@ -6427,66 +6042,31 @@
       </p:sp>
       <p:sp>
         <p:nvSpPr>
-          <p:cNvPr id="4" name="TextBox 3"/>
-          <p:cNvSpPr txBox="1"/>
-          <p:nvPr/>
-        </p:nvSpPr>
-        <p:spPr>
-          <a:xfrm>
-            <a:off x="594360" y="3529584"/>
-            <a:ext cx="11002975" cy="685800"/>
-          </a:xfrm>
-          <a:prstGeom prst="rect">
-            <a:avLst/>
-          </a:prstGeom>
-          <a:noFill/>
-        </p:spPr>
-        <p:txBody>
-          <a:bodyPr wrap="square">
-            <a:spAutoFit/>
-          </a:bodyPr>
-          <a:lstStyle/>
-          <a:p>
-            <a:pPr algn="ctr"/>
-            <a:r>
-              <a:rPr sz="4400" b="1" i="0">
-                <a:solidFill>
-                  <a:srgbClr val="FFFFFF"/>
-                </a:solidFill>
-                <a:latin typeface="Arial"/>
-              </a:rPr>
-              <a:t>Ao laço do Teu amor tão pleno</a:t>
-            </a:r>
-          </a:p>
-        </p:txBody>
-      </p:sp>
-      <p:sp>
-        <p:nvSpPr>
           <p:cNvPr id="5" name="TextBox 4"/>
           <p:cNvSpPr txBox="1"/>
           <p:nvPr/>
         </p:nvSpPr>
         <p:spPr>
           <a:xfrm>
-            <a:off x="594360" y="4251960"/>
-            <a:ext cx="11002975" cy="347472"/>
-          </a:xfrm>
-          <a:prstGeom prst="rect">
-            <a:avLst/>
-          </a:prstGeom>
-          <a:noFill/>
-        </p:spPr>
-        <p:txBody>
-          <a:bodyPr wrap="square">
-            <a:spAutoFit/>
-          </a:bodyPr>
-          <a:lstStyle/>
-          <a:p>
-            <a:pPr algn="ctr"/>
-            <a:r>
-              <a:rPr sz="2200" b="0" i="1">
-                <a:solidFill>
-                  <a:srgbClr val="8C8C8C"/>
+            <a:off x="640080" y="4494276"/>
+            <a:ext cx="10911535" cy="310896"/>
+          </a:xfrm>
+          <a:prstGeom prst="rect">
+            <a:avLst/>
+          </a:prstGeom>
+          <a:noFill/>
+        </p:spPr>
+        <p:txBody>
+          <a:bodyPr wrap="square">
+            <a:spAutoFit/>
+          </a:bodyPr>
+          <a:lstStyle/>
+          <a:p>
+            <a:pPr algn="ctr"/>
+            <a:r>
+              <a:rPr sz="2000" b="0" i="0">
+                <a:solidFill>
+                  <a:srgbClr val="828282"/>
                 </a:solidFill>
                 <a:latin typeface="Arial"/>
               </a:rPr>

--- a/output_pptx/Come_Thou_Fount.pptx
+++ b/output_pptx/Come_Thou_Fount.pptx
@@ -3585,6 +3585,76 @@
           </a:p>
         </p:txBody>
       </p:sp>
+      <p:sp>
+        <p:nvSpPr>
+          <p:cNvPr id="4" name="TextBox 3"/>
+          <p:cNvSpPr txBox="1"/>
+          <p:nvPr/>
+        </p:nvSpPr>
+        <p:spPr>
+          <a:xfrm>
+            <a:off x="640080" y="4128516"/>
+            <a:ext cx="10911535" cy="310896"/>
+          </a:xfrm>
+          <a:prstGeom prst="rect">
+            <a:avLst/>
+          </a:prstGeom>
+          <a:noFill/>
+        </p:spPr>
+        <p:txBody>
+          <a:bodyPr wrap="square">
+            <a:spAutoFit/>
+          </a:bodyPr>
+          <a:lstStyle/>
+          <a:p>
+            <a:pPr algn="ctr"/>
+            <a:r>
+              <a:rPr sz="2000" b="0" i="0">
+                <a:solidFill>
+                  <a:srgbClr val="828282"/>
+                </a:solidFill>
+                <a:latin typeface="Arial"/>
+              </a:rPr>
+              <a:t>迷い出やすい</a:t>
+            </a:r>
+          </a:p>
+        </p:txBody>
+      </p:sp>
+      <p:sp>
+        <p:nvSpPr>
+          <p:cNvPr id="5" name="TextBox 4"/>
+          <p:cNvSpPr txBox="1"/>
+          <p:nvPr/>
+        </p:nvSpPr>
+        <p:spPr>
+          <a:xfrm>
+            <a:off x="640080" y="4494276"/>
+            <a:ext cx="10911535" cy="310896"/>
+          </a:xfrm>
+          <a:prstGeom prst="rect">
+            <a:avLst/>
+          </a:prstGeom>
+          <a:noFill/>
+        </p:spPr>
+        <p:txBody>
+          <a:bodyPr wrap="square">
+            <a:spAutoFit/>
+          </a:bodyPr>
+          <a:lstStyle/>
+          <a:p>
+            <a:pPr algn="ctr"/>
+            <a:r>
+              <a:rPr sz="2000" b="0" i="0">
+                <a:solidFill>
+                  <a:srgbClr val="828282"/>
+                </a:solidFill>
+                <a:latin typeface="Arial"/>
+              </a:rPr>
+              <a:t>主よ、私はそれを感じます</a:t>
+            </a:r>
+          </a:p>
+        </p:txBody>
+      </p:sp>
     </p:spTree>
   </p:cSld>
   <p:clrMapOvr>
@@ -3681,6 +3751,76 @@
           </a:p>
         </p:txBody>
       </p:sp>
+      <p:sp>
+        <p:nvSpPr>
+          <p:cNvPr id="4" name="TextBox 3"/>
+          <p:cNvSpPr txBox="1"/>
+          <p:nvPr/>
+        </p:nvSpPr>
+        <p:spPr>
+          <a:xfrm>
+            <a:off x="640080" y="4128516"/>
+            <a:ext cx="10911535" cy="310896"/>
+          </a:xfrm>
+          <a:prstGeom prst="rect">
+            <a:avLst/>
+          </a:prstGeom>
+          <a:noFill/>
+        </p:spPr>
+        <p:txBody>
+          <a:bodyPr wrap="square">
+            <a:spAutoFit/>
+          </a:bodyPr>
+          <a:lstStyle/>
+          <a:p>
+            <a:pPr algn="ctr"/>
+            <a:r>
+              <a:rPr sz="2000" b="0" i="0">
+                <a:solidFill>
+                  <a:srgbClr val="828282"/>
+                </a:solidFill>
+                <a:latin typeface="Arial"/>
+              </a:rPr>
+              <a:t>捨て去りやすい</a:t>
+            </a:r>
+          </a:p>
+        </p:txBody>
+      </p:sp>
+      <p:sp>
+        <p:nvSpPr>
+          <p:cNvPr id="5" name="TextBox 4"/>
+          <p:cNvSpPr txBox="1"/>
+          <p:nvPr/>
+        </p:nvSpPr>
+        <p:spPr>
+          <a:xfrm>
+            <a:off x="640080" y="4494276"/>
+            <a:ext cx="10911535" cy="310896"/>
+          </a:xfrm>
+          <a:prstGeom prst="rect">
+            <a:avLst/>
+          </a:prstGeom>
+          <a:noFill/>
+        </p:spPr>
+        <p:txBody>
+          <a:bodyPr wrap="square">
+            <a:spAutoFit/>
+          </a:bodyPr>
+          <a:lstStyle/>
+          <a:p>
+            <a:pPr algn="ctr"/>
+            <a:r>
+              <a:rPr sz="2000" b="0" i="0">
+                <a:solidFill>
+                  <a:srgbClr val="828282"/>
+                </a:solidFill>
+                <a:latin typeface="Arial"/>
+              </a:rPr>
+              <a:t>私が愛する神を</a:t>
+            </a:r>
+          </a:p>
+        </p:txBody>
+      </p:sp>
     </p:spTree>
   </p:cSld>
   <p:clrMapOvr>
@@ -4581,6 +4721,76 @@
           </a:p>
         </p:txBody>
       </p:sp>
+      <p:sp>
+        <p:nvSpPr>
+          <p:cNvPr id="4" name="TextBox 3"/>
+          <p:cNvSpPr txBox="1"/>
+          <p:nvPr/>
+        </p:nvSpPr>
+        <p:spPr>
+          <a:xfrm>
+            <a:off x="640080" y="4128516"/>
+            <a:ext cx="10911535" cy="310896"/>
+          </a:xfrm>
+          <a:prstGeom prst="rect">
+            <a:avLst/>
+          </a:prstGeom>
+          <a:noFill/>
+        </p:spPr>
+        <p:txBody>
+          <a:bodyPr wrap="square">
+            <a:spAutoFit/>
+          </a:bodyPr>
+          <a:lstStyle/>
+          <a:p>
+            <a:pPr algn="ctr"/>
+            <a:r>
+              <a:rPr sz="2000" b="0" i="0">
+                <a:solidFill>
+                  <a:srgbClr val="828282"/>
+                </a:solidFill>
+                <a:latin typeface="Arial"/>
+              </a:rPr>
+              <a:t>あなたの永遠の愛でそれを封じてください</a:t>
+            </a:r>
+          </a:p>
+        </p:txBody>
+      </p:sp>
+      <p:sp>
+        <p:nvSpPr>
+          <p:cNvPr id="5" name="TextBox 4"/>
+          <p:cNvSpPr txBox="1"/>
+          <p:nvPr/>
+        </p:nvSpPr>
+        <p:spPr>
+          <a:xfrm>
+            <a:off x="640080" y="4494276"/>
+            <a:ext cx="10911535" cy="310896"/>
+          </a:xfrm>
+          <a:prstGeom prst="rect">
+            <a:avLst/>
+          </a:prstGeom>
+          <a:noFill/>
+        </p:spPr>
+        <p:txBody>
+          <a:bodyPr wrap="square">
+            <a:spAutoFit/>
+          </a:bodyPr>
+          <a:lstStyle/>
+          <a:p>
+            <a:pPr algn="ctr"/>
+            <a:r>
+              <a:rPr sz="2000" b="0" i="0">
+                <a:solidFill>
+                  <a:srgbClr val="828282"/>
+                </a:solidFill>
+                <a:latin typeface="Arial"/>
+              </a:rPr>
+              <a:t>二度と私があなたから離れることがないように</a:t>
+            </a:r>
+          </a:p>
+        </p:txBody>
+      </p:sp>
     </p:spTree>
   </p:cSld>
   <p:clrMapOvr>
@@ -4677,6 +4887,76 @@
           </a:p>
         </p:txBody>
       </p:sp>
+      <p:sp>
+        <p:nvSpPr>
+          <p:cNvPr id="4" name="TextBox 3"/>
+          <p:cNvSpPr txBox="1"/>
+          <p:nvPr/>
+        </p:nvSpPr>
+        <p:spPr>
+          <a:xfrm>
+            <a:off x="640080" y="4128516"/>
+            <a:ext cx="10911535" cy="310896"/>
+          </a:xfrm>
+          <a:prstGeom prst="rect">
+            <a:avLst/>
+          </a:prstGeom>
+          <a:noFill/>
+        </p:spPr>
+        <p:txBody>
+          <a:bodyPr wrap="square">
+            <a:spAutoFit/>
+          </a:bodyPr>
+          <a:lstStyle/>
+          <a:p>
+            <a:pPr algn="ctr"/>
+            <a:r>
+              <a:rPr sz="2000" b="0" i="0">
+                <a:solidFill>
+                  <a:srgbClr val="828282"/>
+                </a:solidFill>
+                <a:latin typeface="Arial"/>
+              </a:rPr>
+              <a:t>あなたの永遠の愛でそれを封じてください</a:t>
+            </a:r>
+          </a:p>
+        </p:txBody>
+      </p:sp>
+      <p:sp>
+        <p:nvSpPr>
+          <p:cNvPr id="5" name="TextBox 4"/>
+          <p:cNvSpPr txBox="1"/>
+          <p:nvPr/>
+        </p:nvSpPr>
+        <p:spPr>
+          <a:xfrm>
+            <a:off x="640080" y="4494276"/>
+            <a:ext cx="10911535" cy="310896"/>
+          </a:xfrm>
+          <a:prstGeom prst="rect">
+            <a:avLst/>
+          </a:prstGeom>
+          <a:noFill/>
+        </p:spPr>
+        <p:txBody>
+          <a:bodyPr wrap="square">
+            <a:spAutoFit/>
+          </a:bodyPr>
+          <a:lstStyle/>
+          <a:p>
+            <a:pPr algn="ctr"/>
+            <a:r>
+              <a:rPr sz="2000" b="0" i="0">
+                <a:solidFill>
+                  <a:srgbClr val="828282"/>
+                </a:solidFill>
+                <a:latin typeface="Arial"/>
+              </a:rPr>
+              <a:t>二度と私があなたから離れることがないように</a:t>
+            </a:r>
+          </a:p>
+        </p:txBody>
+      </p:sp>
     </p:spTree>
   </p:cSld>
   <p:clrMapOvr>
@@ -5341,6 +5621,76 @@
           </a:p>
         </p:txBody>
       </p:sp>
+      <p:sp>
+        <p:nvSpPr>
+          <p:cNvPr id="4" name="TextBox 3"/>
+          <p:cNvSpPr txBox="1"/>
+          <p:nvPr/>
+        </p:nvSpPr>
+        <p:spPr>
+          <a:xfrm>
+            <a:off x="640080" y="4128516"/>
+            <a:ext cx="10911535" cy="310896"/>
+          </a:xfrm>
+          <a:prstGeom prst="rect">
+            <a:avLst/>
+          </a:prstGeom>
+          <a:noFill/>
+        </p:spPr>
+        <p:txBody>
+          <a:bodyPr wrap="square">
+            <a:spAutoFit/>
+          </a:bodyPr>
+          <a:lstStyle/>
+          <a:p>
+            <a:pPr algn="ctr"/>
+            <a:r>
+              <a:rPr sz="2000" b="0" i="0">
+                <a:solidFill>
+                  <a:srgbClr val="828282"/>
+                </a:solidFill>
+                <a:latin typeface="Arial"/>
+              </a:rPr>
+              <a:t>ハレルヤ！ハレルヤ！</a:t>
+            </a:r>
+          </a:p>
+        </p:txBody>
+      </p:sp>
+      <p:sp>
+        <p:nvSpPr>
+          <p:cNvPr id="5" name="TextBox 4"/>
+          <p:cNvSpPr txBox="1"/>
+          <p:nvPr/>
+        </p:nvSpPr>
+        <p:spPr>
+          <a:xfrm>
+            <a:off x="640080" y="4494276"/>
+            <a:ext cx="10911535" cy="310896"/>
+          </a:xfrm>
+          <a:prstGeom prst="rect">
+            <a:avLst/>
+          </a:prstGeom>
+          <a:noFill/>
+        </p:spPr>
+        <p:txBody>
+          <a:bodyPr wrap="square">
+            <a:spAutoFit/>
+          </a:bodyPr>
+          <a:lstStyle/>
+          <a:p>
+            <a:pPr algn="ctr"/>
+            <a:r>
+              <a:rPr sz="2000" b="0" i="0">
+                <a:solidFill>
+                  <a:srgbClr val="828282"/>
+                </a:solidFill>
+                <a:latin typeface="Arial"/>
+              </a:rPr>
+              <a:t>アレルヤ！私は主のものです！</a:t>
+            </a:r>
+          </a:p>
+        </p:txBody>
+      </p:sp>
     </p:spTree>
   </p:cSld>
   <p:clrMapOvr>
@@ -5433,6 +5783,76 @@
                 <a:latin typeface="Arial"/>
               </a:rPr>
               <a:t>E Tua graça ainda me guia</a:t>
+            </a:r>
+          </a:p>
+        </p:txBody>
+      </p:sp>
+      <p:sp>
+        <p:nvSpPr>
+          <p:cNvPr id="4" name="TextBox 3"/>
+          <p:cNvSpPr txBox="1"/>
+          <p:nvPr/>
+        </p:nvSpPr>
+        <p:spPr>
+          <a:xfrm>
+            <a:off x="640080" y="4128516"/>
+            <a:ext cx="10911535" cy="310896"/>
+          </a:xfrm>
+          <a:prstGeom prst="rect">
+            <a:avLst/>
+          </a:prstGeom>
+          <a:noFill/>
+        </p:spPr>
+        <p:txBody>
+          <a:bodyPr wrap="square">
+            <a:spAutoFit/>
+          </a:bodyPr>
+          <a:lstStyle/>
+          <a:p>
+            <a:pPr algn="ctr"/>
+            <a:r>
+              <a:rPr sz="2000" b="0" i="0">
+                <a:solidFill>
+                  <a:srgbClr val="828282"/>
+                </a:solidFill>
+                <a:latin typeface="Arial"/>
+              </a:rPr>
+              <a:t>今まであなたは私を導いてくれました</a:t>
+            </a:r>
+          </a:p>
+        </p:txBody>
+      </p:sp>
+      <p:sp>
+        <p:nvSpPr>
+          <p:cNvPr id="5" name="TextBox 4"/>
+          <p:cNvSpPr txBox="1"/>
+          <p:nvPr/>
+        </p:nvSpPr>
+        <p:spPr>
+          <a:xfrm>
+            <a:off x="640080" y="4494276"/>
+            <a:ext cx="10911535" cy="310896"/>
+          </a:xfrm>
+          <a:prstGeom prst="rect">
+            <a:avLst/>
+          </a:prstGeom>
+          <a:noFill/>
+        </p:spPr>
+        <p:txBody>
+          <a:bodyPr wrap="square">
+            <a:spAutoFit/>
+          </a:bodyPr>
+          <a:lstStyle/>
+          <a:p>
+            <a:pPr algn="ctr"/>
+            <a:r>
+              <a:rPr sz="2000" b="0" i="0">
+                <a:solidFill>
+                  <a:srgbClr val="828282"/>
+                </a:solidFill>
+                <a:latin typeface="Arial"/>
+              </a:rPr>
+              <a:t>そしてあなたの恵みは今も私を導きます</a:t>
             </a:r>
           </a:p>
         </p:txBody>
